--- a/BTP_MidSem_Presentation.pptx
+++ b/BTP_MidSem_Presentation.pptx
@@ -514,7 +514,8 @@
           <a:p>
             <a:r>
               <a:rPr lang="en-US" dirty="0"/>
-              <a:t/>
+              <a:t>NITESH - 10 s
+Greet, give the title once, name the three of us and the supervisor. Do not read the slide. Move on.</a:t>
             </a:r>
             <a:endParaRPr lang="en-US" dirty="0"/>
           </a:p>
@@ -602,7 +603,8 @@
           <a:p>
             <a:r>
               <a:rPr lang="en-US" dirty="0"/>
-              <a:t/>
+              <a:t>SAJAN - 50 s
+Deliver this confidently, not apologetically. I/Q imbalance destroys the cumulant features. But dispersion inverts our own headline: at 150 ps/nm the SVM scores 80.1% and the CNN 54.9%. We report it because it bounds the claim. If asked why it happens, say honestly that we have a hypothesis we have not tested - dispersion smears the local image structure the CNN relies on, while cumulants are computed over the whole capture. Do not invent certainty.</a:t>
             </a:r>
             <a:endParaRPr lang="en-US" dirty="0"/>
           </a:p>
@@ -690,7 +692,8 @@
           <a:p>
             <a:r>
               <a:rPr lang="en-US" dirty="0"/>
-              <a:t/>
+              <a:t>NITESH - 45 s
+Six lines; read the first and the last properly. The representation is the dominant design variable; the gap widens under mismatch; it also decides whether a confidence-gated monitor stays usable at all. End on the limitations line - stating them yourself is worth more than being asked.</a:t>
             </a:r>
             <a:endParaRPr lang="en-US" dirty="0"/>
           </a:p>
@@ -778,7 +781,8 @@
           <a:p>
             <a:r>
               <a:rPr lang="en-US" dirty="0"/>
-              <a:t/>
+              <a:t>NITESH - 25 s
+Manuscript is complete and compiles clean; targeting QPAIN 2027, deadline 30 November. Be straight that it is not submitted yet and needs a trim to the page limit. Mention the code is public and every number regenerates from a fixed seed.</a:t>
             </a:r>
             <a:endParaRPr lang="en-US" dirty="0"/>
           </a:p>
@@ -866,7 +870,8 @@
           <a:p>
             <a:r>
               <a:rPr lang="en-US" dirty="0"/>
-              <a:t/>
+              <a:t>ANY - 5 s
+Do not read these. Leave the slide up and say 'happy to take questions.' Keeping it on screen during Q&amp;A lets you point at a reference if challenged.</a:t>
             </a:r>
             <a:endParaRPr lang="en-US" dirty="0"/>
           </a:p>
@@ -954,7 +959,8 @@
           <a:p>
             <a:r>
               <a:rPr lang="en-US" dirty="0"/>
-              <a:t/>
+              <a:t>NITESH - 15 s
+One sentence: "I'll cover the problem and the literature, Yash takes the method, Sajan takes the results." Then advance. Do not read nine bullets aloud.</a:t>
             </a:r>
             <a:endParaRPr lang="en-US" dirty="0"/>
           </a:p>
@@ -1042,7 +1048,8 @@
           <a:p>
             <a:r>
               <a:rPr lang="en-US" dirty="0"/>
-              <a:t/>
+              <a:t>NITESH - 65 s
+Fibre carries data as light. Vary amplitude AND phase and one pulse carries several bits - that pulse is a symbol, the allowed set is the modulation format, and plotted on the I-Q plane it is the constellation diagram. Point at the picture: five formats down, noise decreasing to the right. Then the problem: modern networks switch format with link conditions, and the receiver cannot demodulate until it knows which one arrived. MFI works it out from the signal itself. PAUSE on the picture - it does the teaching for you.</a:t>
             </a:r>
             <a:endParaRPr lang="en-US" dirty="0"/>
           </a:p>
@@ -1130,7 +1137,8 @@
           <a:p>
             <a:r>
               <a:rPr lang="en-US" dirty="0"/>
-              <a:t/>
+              <a:t>NITESH - 60 s
+Four groups, one line each. Classical work uses cumulants because Gaussian noise cancels at fourth order and above. Others swapped in different hand-crafted representations. Then CNNs on constellation images, reported as a large gain. Wireless has asked a similar question - say that out loud, do not hide it. Land hard on the last bullet: every optical comparison changes the model and the input together, so nobody can say which caused the gain. That sentence sets up the whole talk.</a:t>
             </a:r>
             <a:endParaRPr lang="en-US" dirty="0"/>
           </a:p>
@@ -1218,7 +1226,8 @@
           <a:p>
             <a:r>
               <a:rPr lang="en-US" dirty="0"/>
-              <a:t/>
+              <a:t>YASH - 40 s
+Read the first objective properly; skim the rest. The point of this slide is that we set out to ANSWER a question, not to build a classifier. Twenty seconds on bullet one, twenty on the other five together.</a:t>
             </a:r>
             <a:endParaRPr lang="en-US" dirty="0"/>
           </a:p>
@@ -1306,7 +1315,8 @@
           <a:p>
             <a:r>
               <a:rPr lang="en-US" dirty="0"/>
-              <a:t/>
+              <a:t>YASH - 65 s
+We simulate the link - no public optical constellation dataset exists, and we need exactly controlled OSNR sweeps. Walk the signal chain quickly, then stop on validation: the fourth-order cumulant of a noiseless constellation is exact algebra, and our simulator reproduces it to within 0.004 for all five formats. That is the answer to 'how do you know your simulator is right?', so say it before they ask. Finish on the three representations coming from the SAME signal realisation - that is what makes the comparison fair.</a:t>
             </a:r>
             <a:endParaRPr lang="en-US" dirty="0"/>
           </a:p>
@@ -1394,7 +1404,8 @@
           <a:p>
             <a:r>
               <a:rPr lang="en-US" dirty="0"/>
-              <a:t/>
+              <a:t>YASH - 70 s
+This is the contribution slide. Spend the time. Walk the table out loud: across a row only the algorithm changes; down the deep-model column only the input changes. The MLP is the cell nobody fills - a trained deep network fed only the 15 features. Say why it settles the question either way: if it lands near the SVM, the representation matters; near the CNN, the model matters. Then the five classifiers and seven experiments in one breath.</a:t>
             </a:r>
             <a:endParaRPr lang="en-US" dirty="0"/>
           </a:p>
@@ -1482,7 +1493,8 @@
           <a:p>
             <a:r>
               <a:rPr lang="en-US" dirty="0"/>
-              <a:t/>
+              <a:t>SAJAN - 65 s
+Let them read the chart for three seconds before you speak. Three very different algorithms on identical features sit within 1.83 points of each other. The CNN on the image gains 5.32 over the strongest of them - 2.9 times as much. If asked why 5.32 and not 5.65: we compare against the BEST baseline, the SVM, because that is the harder test. Close on the MLP finishing below the SVM - depth on features bought nothing.</a:t>
             </a:r>
             <a:endParaRPr lang="en-US" dirty="0"/>
           </a:p>
@@ -1570,7 +1582,8 @@
           <a:p>
             <a:r>
               <a:rPr lang="en-US" dirty="0"/>
-              <a:t/>
+              <a:t>SAJAN - 70 s
+Two results here. First the margin: the CNN hits 95% at 7 dB where the SVM needs 14 - quote the margin, not the percentage, because it converts into reach or amplifier count. Then robustness, the strongest result: trained clean and tested severe, the CNN holds 89.8% while the SVM falls to 21.8% against a 20% chance level. Give the mechanism, not just the number - cumulants are statistics of an ASSUMED signal model. Then confidence: at a 90% gate the CNN still answers 86.9% of inputs, the SVM answers 0.2%.</a:t>
             </a:r>
             <a:endParaRPr lang="en-US" dirty="0"/>
           </a:p>

--- a/BTP_MidSem_Presentation.pptx
+++ b/BTP_MidSem_Presentation.pptx
@@ -17,10 +17,9 @@
     <p:sldId id="265" r:id="rId11"/>
     <p:sldId id="266" r:id="rId12"/>
     <p:sldId id="267" r:id="rId13"/>
-    <p:sldId id="268" r:id="rId14"/>
   </p:sldIdLst>
   <p:notesMasterIdLst>
-    <p:notesMasterId r:id="rId15"/>
+    <p:notesMasterId r:id="rId14"/>
   </p:notesMasterIdLst>
   <p:sldSz cx="9144000" cy="6858000"/>
   <p:notesSz cx="6858000" cy="9144000"/>
@@ -515,7 +514,7 @@
             <a:r>
               <a:rPr lang="en-US" dirty="0"/>
               <a:t>NITESH - 10 s
-Greet, give the title once, name the three of us and the supervisor. Do not read the slide. Move on.</a:t>
+Greet, give the title once, name the three of us and the supervisor. Do not read the slide.</a:t>
             </a:r>
             <a:endParaRPr lang="en-US" dirty="0"/>
           </a:p>
@@ -603,8 +602,8 @@
           <a:p>
             <a:r>
               <a:rPr lang="en-US" dirty="0"/>
-              <a:t>SAJAN - 50 s
-Deliver this confidently, not apologetically. I/Q imbalance destroys the cumulant features. But dispersion inverts our own headline: at 150 ps/nm the SVM scores 80.1% and the CNN 54.9%. We report it because it bounds the claim. If asked why it happens, say honestly that we have a hypothesis we have not tested - dispersion smears the local image structure the CNN relies on, while cumulants are computed over the whole capture. Do not invent certainty.</a:t>
+              <a:t>NITESH - 45 s
+Read the first and last bullets properly. The representation is the dominant design variable. It is not an artefact of training. End on the Phase 1 / Phase 2 line - it frames everything that follows in December.</a:t>
             </a:r>
             <a:endParaRPr lang="en-US" dirty="0"/>
           </a:p>
@@ -692,8 +691,8 @@
           <a:p>
             <a:r>
               <a:rPr lang="en-US" dirty="0"/>
-              <a:t>NITESH - 45 s
-Six lines; read the first and the last properly. The representation is the dominant design variable; the gap widens under mismatch; it also decides whether a confidence-gated monitor stays usable at all. End on the limitations line - stating them yourself is worth more than being asked.</a:t>
+              <a:t>NITESH - 25 s
+Manuscript is complete and compiles; targeting QPAIN 2027, deadline 30 November. Be straight that it is not submitted. Mention the code is public and every number regenerates from a fixed seed.</a:t>
             </a:r>
             <a:endParaRPr lang="en-US" dirty="0"/>
           </a:p>
@@ -781,8 +780,8 @@
           <a:p>
             <a:r>
               <a:rPr lang="en-US" dirty="0"/>
-              <a:t>NITESH - 25 s
-Manuscript is complete and compiles clean; targeting QPAIN 2027, deadline 30 November. Be straight that it is not submitted yet and needs a trim to the page limit. Mention the code is public and every number regenerates from a fixed seed.</a:t>
+              <a:t>ANY - 5 s
+Do not read these. Leave the slide up and say 'happy to take questions.'</a:t>
             </a:r>
             <a:endParaRPr lang="en-US" dirty="0"/>
           </a:p>
@@ -806,95 +805,6 @@
             <a:fld id="{F7021451-1387-4CA6-816F-3879F97B5CBC}" type="slidenum">
               <a:rPr lang="en-US"/>
               <a:t>12</a:t>
-            </a:fld>
-            <a:endParaRPr lang="en-US"/>
-          </a:p>
-        </p:txBody>
-      </p:sp>
-    </p:spTree>
-    <p:extLst>
-      <p:ext uri="{BB962C8B-B14F-4D97-AF65-F5344CB8AC3E}">
-        <p14:creationId xmlns:p14="http://schemas.microsoft.com/office/powerpoint/2010/main" val="1024086991"/>
-      </p:ext>
-    </p:extLst>
-  </p:cSld>
-  <p:clrMapOvr>
-    <a:masterClrMapping/>
-  </p:clrMapOvr>
-</p:notes>
-</file>
-
-<file path=ppt/notesSlides/notesSlide13.xml><?xml version="1.0" encoding="utf-8"?>
-<p:notes xmlns:a="http://schemas.openxmlformats.org/drawingml/2006/main" xmlns:r="http://schemas.openxmlformats.org/officeDocument/2006/relationships" xmlns:p="http://schemas.openxmlformats.org/presentationml/2006/main">
-  <p:cSld>
-    <p:spTree>
-      <p:nvGrpSpPr>
-        <p:cNvPr id="1" name=""/>
-        <p:cNvGrpSpPr/>
-        <p:nvPr/>
-      </p:nvGrpSpPr>
-      <p:grpSpPr>
-        <a:xfrm>
-          <a:off x="0" y="0"/>
-          <a:ext cx="0" cy="0"/>
-          <a:chOff x="0" y="0"/>
-          <a:chExt cx="0" cy="0"/>
-        </a:xfrm>
-      </p:grpSpPr>
-      <p:sp>
-        <p:nvSpPr>
-          <p:cNvPr id="2" name="Slide Image Placeholder 1"/>
-          <p:cNvSpPr>
-            <a:spLocks noGrp="1" noRot="1" noChangeAspect="1"/>
-          </p:cNvSpPr>
-          <p:nvPr>
-            <p:ph type="sldImg"/>
-          </p:nvPr>
-        </p:nvSpPr>
-        <p:spPr/>
-      </p:sp>
-      <p:sp>
-        <p:nvSpPr>
-          <p:cNvPr id="3" name="Notes Placeholder 2"/>
-          <p:cNvSpPr>
-            <a:spLocks noGrp="1"/>
-          </p:cNvSpPr>
-          <p:nvPr>
-            <p:ph type="body" idx="1"/>
-          </p:nvPr>
-        </p:nvSpPr>
-        <p:spPr/>
-        <p:txBody>
-          <a:bodyPr/>
-          <a:lstStyle/>
-          <a:p>
-            <a:r>
-              <a:rPr lang="en-US" dirty="0"/>
-              <a:t>ANY - 5 s
-Do not read these. Leave the slide up and say 'happy to take questions.' Keeping it on screen during Q&amp;A lets you point at a reference if challenged.</a:t>
-            </a:r>
-            <a:endParaRPr lang="en-US" dirty="0"/>
-          </a:p>
-        </p:txBody>
-      </p:sp>
-      <p:sp>
-        <p:nvSpPr>
-          <p:cNvPr id="4" name="Slide Number Placeholder 3"/>
-          <p:cNvSpPr>
-            <a:spLocks noGrp="1"/>
-          </p:cNvSpPr>
-          <p:nvPr>
-            <p:ph type="sldNum" sz="quarter" idx="10"/>
-          </p:nvPr>
-        </p:nvSpPr>
-        <p:spPr/>
-        <p:txBody>
-          <a:bodyPr/>
-          <a:lstStyle/>
-          <a:p>
-            <a:fld id="{F7021451-1387-4CA6-816F-3879F97B5CBC}" type="slidenum">
-              <a:rPr lang="en-US"/>
-              <a:t>13</a:t>
             </a:fld>
             <a:endParaRPr lang="en-US"/>
           </a:p>
@@ -960,7 +870,7 @@
             <a:r>
               <a:rPr lang="en-US" dirty="0"/>
               <a:t>NITESH - 15 s
-One sentence: "I'll cover the problem and the literature, Yash takes the method, Sajan takes the results." Then advance. Do not read nine bullets aloud.</a:t>
+One sentence: 'I'll cover the problem and the literature, Yash takes the method, Sajan takes the results.' Then advance.</a:t>
             </a:r>
             <a:endParaRPr lang="en-US" dirty="0"/>
           </a:p>
@@ -1049,7 +959,7 @@
             <a:r>
               <a:rPr lang="en-US" dirty="0"/>
               <a:t>NITESH - 65 s
-Fibre carries data as light. Vary amplitude AND phase and one pulse carries several bits - that pulse is a symbol, the allowed set is the modulation format, and plotted on the I-Q plane it is the constellation diagram. Point at the picture: five formats down, noise decreasing to the right. Then the problem: modern networks switch format with link conditions, and the receiver cannot demodulate until it knows which one arrived. MFI works it out from the signal itself. PAUSE on the picture - it does the teaching for you.</a:t>
+Fibre carries data as light. Vary amplitude AND phase and one pulse carries several bits - that pulse is a symbol, the allowed set is the modulation format, and on the I-Q plane it is the constellation diagram. Point at the picture. Then the problem: networks switch format with link conditions, and the receiver cannot demodulate until it knows which arrived. PAUSE on the picture.</a:t>
             </a:r>
             <a:endParaRPr lang="en-US" dirty="0"/>
           </a:p>
@@ -1138,7 +1048,7 @@
             <a:r>
               <a:rPr lang="en-US" dirty="0"/>
               <a:t>NITESH - 60 s
-Four groups, one line each. Classical work uses cumulants because Gaussian noise cancels at fourth order and above. Others swapped in different hand-crafted representations. Then CNNs on constellation images, reported as a large gain. Wireless has asked a similar question - say that out loud, do not hide it. Land hard on the last bullet: every optical comparison changes the model and the input together, so nobody can say which caused the gain. That sentence sets up the whole talk.</a:t>
+Four groups, one line each. Cumulants are classical because Gaussian noise cancels at fourth order. Others swapped in different hand-crafted representations. Then CNNs on constellation images. Wireless has asked a similar question - say it out loud, do not hide it. Land hard on the last bullet: every optical comparison changes the model and the input together.</a:t>
             </a:r>
             <a:endParaRPr lang="en-US" dirty="0"/>
           </a:p>
@@ -1227,7 +1137,7 @@
             <a:r>
               <a:rPr lang="en-US" dirty="0"/>
               <a:t>YASH - 40 s
-Read the first objective properly; skim the rest. The point of this slide is that we set out to ANSWER a question, not to build a classifier. Twenty seconds on bullet one, twenty on the other five together.</a:t>
+Read the first objective properly, skim the rest. The point: we set out to ANSWER a question, not build a classifier.</a:t>
             </a:r>
             <a:endParaRPr lang="en-US" dirty="0"/>
           </a:p>
@@ -1316,7 +1226,7 @@
             <a:r>
               <a:rPr lang="en-US" dirty="0"/>
               <a:t>YASH - 65 s
-We simulate the link - no public optical constellation dataset exists, and we need exactly controlled OSNR sweeps. Walk the signal chain quickly, then stop on validation: the fourth-order cumulant of a noiseless constellation is exact algebra, and our simulator reproduces it to within 0.004 for all five formats. That is the answer to 'how do you know your simulator is right?', so say it before they ask. Finish on the three representations coming from the SAME signal realisation - that is what makes the comparison fair.</a:t>
+We simulate - no public optical constellation dataset exists and we need exactly controlled OSNR sweeps. Walk the chain quickly, then stop on validation: the fourth-order cumulant of a noiseless constellation is exact algebra and we match it to within 0.004. That is the answer to 'how do you know your simulator is right?'. Finish on all three representations coming from the SAME realisation.</a:t>
             </a:r>
             <a:endParaRPr lang="en-US" dirty="0"/>
           </a:p>
@@ -1405,7 +1315,7 @@
             <a:r>
               <a:rPr lang="en-US" dirty="0"/>
               <a:t>YASH - 70 s
-This is the contribution slide. Spend the time. Walk the table out loud: across a row only the algorithm changes; down the deep-model column only the input changes. The MLP is the cell nobody fills - a trained deep network fed only the 15 features. Say why it settles the question either way: if it lands near the SVM, the representation matters; near the CNN, the model matters. Then the five classifiers and seven experiments in one breath.</a:t>
+The contribution slide. Spend the time. Across a row only the algorithm changes; down the deep column only the input changes. The MLP is the cell nobody fills. Say why it settles the question either way: near the SVM means representation matters, near the CNN means the model matters.</a:t>
             </a:r>
             <a:endParaRPr lang="en-US" dirty="0"/>
           </a:p>
@@ -1493,8 +1403,8 @@
           <a:p>
             <a:r>
               <a:rPr lang="en-US" dirty="0"/>
-              <a:t>SAJAN - 65 s
-Let them read the chart for three seconds before you speak. Three very different algorithms on identical features sit within 1.83 points of each other. The CNN on the image gains 5.32 over the strongest of them - 2.9 times as much. If asked why 5.32 and not 5.65: we compare against the BEST baseline, the SVM, because that is the harder test. Close on the MLP finishing below the SVM - depth on features bought nothing.</a:t>
+              <a:t>SAJAN - 90 s
+Your only results slide, so give it room. Let them read the chart for three seconds first. Three different algorithms on identical features sit within 1.83 points. The CNN gains 5.32 over the strongest of them - 2.9 times as much. If asked why 5.32 and not 5.65: we compare against the BEST baseline because it is the harder test. Then the 7 dB margin, which converts into reach. Then generalisation - 97.45% on OSNR levels never seen, so it learned the physics not the noise levels. Then capture length - 512 symbols beats the SVM at 4096.</a:t>
             </a:r>
             <a:endParaRPr lang="en-US" dirty="0"/>
           </a:p>
@@ -1582,8 +1492,8 @@
           <a:p>
             <a:r>
               <a:rPr lang="en-US" dirty="0"/>
-              <a:t>SAJAN - 70 s
-Two results here. First the margin: the CNN hits 95% at 7 dB where the SVM needs 14 - quote the margin, not the percentage, because it converts into reach or amplifier count. Then robustness, the strongest result: trained clean and tested severe, the CNN holds 89.8% while the SVM falls to 21.8% against a 20% chance level. Give the mechanism, not just the number - cumulants are statistics of an ASSUMED signal model. Then confidence: at a 90% gate the CNN still answers 86.9% of inputs, the SVM answers 0.2%.</a:t>
+              <a:t>SAJAN - 60 s
+This slide does two jobs. First: four further experiments ARE complete - say complete, not 'planned' - with analysis in preparation. Give each one line, no more. If anyone asks for a number, give it immediately; never look evasive. Second: the three candidate directions. End by genuinely asking which they want prioritised, then STOP TALKING and let them answer. That question is the point of the slide.</a:t>
             </a:r>
             <a:endParaRPr lang="en-US" dirty="0"/>
           </a:p>
@@ -2488,7 +2398,7 @@
                 <a:ea typeface="Times New Roman" pitchFamily="34" charset="-122"/>
                 <a:cs typeface="Times New Roman" pitchFamily="34" charset="-120"/>
               </a:rPr>
-              <a:t>RESULTS — AN HONEST NEGATIVE</a:t>
+              <a:t>CONCLUSIONS</a:t>
             </a:r>
             <a:endParaRPr lang="en-US" sz="3200" dirty="0"/>
           </a:p>
@@ -2572,40 +2482,16 @@
           </a:p>
         </p:txBody>
       </p:sp>
-      <p:pic>
-        <p:nvPicPr>
-          <p:cNvPr id="5" name="Image 0" descr="D:\research paper\figures\slide_dispersion.png">    </p:cNvPr>
-          <p:cNvPicPr>
-            <a:picLocks noChangeAspect="1"/>
-          </p:cNvPicPr>
+      <p:sp>
+        <p:nvSpPr>
+          <p:cNvPr id="5" name="Text 3"/>
+          <p:cNvSpPr txBox="1"/>
           <p:nvPr/>
-        </p:nvPicPr>
-        <p:blipFill>
-          <a:blip r:embed="rId1"/>
-          <a:stretch>
-            <a:fillRect/>
-          </a:stretch>
-        </p:blipFill>
+        </p:nvSpPr>
         <p:spPr>
           <a:xfrm>
-            <a:off x="1143000" y="914400"/>
-            <a:ext cx="6858000" cy="3913632"/>
-          </a:xfrm>
-          <a:prstGeom prst="rect">
-            <a:avLst/>
-          </a:prstGeom>
-        </p:spPr>
-      </p:pic>
-      <p:sp>
-        <p:nvSpPr>
-          <p:cNvPr id="6" name="Text 3"/>
-          <p:cNvSpPr txBox="1"/>
-          <p:nvPr/>
-        </p:nvSpPr>
-        <p:spPr>
-          <a:xfrm>
-            <a:off x="548640" y="4956048"/>
-            <a:ext cx="8046720" cy="1371600"/>
+            <a:off x="548640" y="1097280"/>
+            <a:ext cx="8046720" cy="5120640"/>
           </a:xfrm>
           <a:prstGeom prst="rect">
             <a:avLst/>
@@ -2619,65 +2505,107 @@
           <a:p>
             <a:pPr marL="342900" indent="-342900">
               <a:spcAft>
-                <a:spcPts val="500"/>
+                <a:spcPts val="900"/>
               </a:spcAft>
               <a:buSzPct val="100000"/>
               <a:buChar char="▪"/>
             </a:pPr>
             <a:r>
-              <a:rPr lang="en-US" sz="1450" dirty="0">
-                <a:solidFill>
-                  <a:srgbClr val="000000"/>
-                </a:solidFill>
-                <a:latin typeface="Times New Roman" pitchFamily="34" charset="0"/>
-                <a:ea typeface="Times New Roman" pitchFamily="34" charset="-122"/>
-                <a:cs typeface="Times New Roman" pitchFamily="34" charset="-120"/>
-              </a:rPr>
-              <a:t>I/Q imbalance destroys the cumulant features: at 2.5 dB the SVM falls to 20.35 % while the CNN holds 95.48 %.</a:t>
-            </a:r>
-            <a:endParaRPr lang="en-US" sz="1450" dirty="0"/>
+              <a:rPr lang="en-US" sz="1600" b="1" dirty="0">
+                <a:solidFill>
+                  <a:srgbClr val="000000"/>
+                </a:solidFill>
+                <a:latin typeface="Times New Roman" pitchFamily="34" charset="0"/>
+                <a:ea typeface="Times New Roman" pitchFamily="34" charset="-122"/>
+                <a:cs typeface="Times New Roman" pitchFamily="34" charset="-120"/>
+              </a:rPr>
+              <a:t>The input representation, not the learning algorithm, is the dominant design variable in optical modulation format identification — worth 2.9× as much.</a:t>
+            </a:r>
+            <a:endParaRPr lang="en-US" sz="1600" dirty="0"/>
           </a:p>
           <a:p>
             <a:pPr marL="342900" indent="-342900">
               <a:spcAft>
-                <a:spcPts val="500"/>
+                <a:spcPts val="900"/>
               </a:spcAft>
               <a:buSzPct val="100000"/>
               <a:buChar char="▪"/>
             </a:pPr>
             <a:r>
-              <a:rPr lang="en-US" sz="1450" b="1" dirty="0">
-                <a:solidFill>
-                  <a:srgbClr val="000000"/>
-                </a:solidFill>
-                <a:latin typeface="Times New Roman" pitchFamily="34" charset="0"/>
-                <a:ea typeface="Times New Roman" pitchFamily="34" charset="-122"/>
-                <a:cs typeface="Times New Roman" pitchFamily="34" charset="-120"/>
-              </a:rPr>
-              <a:t>But residual chromatic dispersion inverts the headline. At 150 ps/nm the SVM scores 80.14 % and the CNN only 54.89 %.</a:t>
-            </a:r>
-            <a:endParaRPr lang="en-US" sz="1450" dirty="0"/>
+              <a:rPr lang="en-US" sz="1600" dirty="0">
+                <a:solidFill>
+                  <a:srgbClr val="000000"/>
+                </a:solidFill>
+                <a:latin typeface="Times New Roman" pitchFamily="34" charset="0"/>
+                <a:ea typeface="Times New Roman" pitchFamily="34" charset="-122"/>
+                <a:cs typeface="Times New Roman" pitchFamily="34" charset="-120"/>
+              </a:rPr>
+              <a:t>Three very different algorithms on identical features perform within 1.83 points of one another. Adding depth to the feature pipeline bought nothing.</a:t>
+            </a:r>
+            <a:endParaRPr lang="en-US" sz="1600" dirty="0"/>
           </a:p>
           <a:p>
             <a:pPr marL="342900" indent="-342900">
               <a:spcAft>
-                <a:spcPts val="500"/>
+                <a:spcPts val="900"/>
               </a:spcAft>
               <a:buSzPct val="100000"/>
               <a:buChar char="▪"/>
             </a:pPr>
             <a:r>
-              <a:rPr lang="en-US" sz="1450" dirty="0">
-                <a:solidFill>
-                  <a:srgbClr val="000000"/>
-                </a:solidFill>
-                <a:latin typeface="Times New Roman" pitchFamily="34" charset="0"/>
-                <a:ea typeface="Times New Roman" pitchFamily="34" charset="-122"/>
-                <a:cs typeface="Times New Roman" pitchFamily="34" charset="-120"/>
-              </a:rPr>
-              <a:t>We report this rather than bury it — it bounds the claim and points to a possible hybrid representation.</a:t>
-            </a:r>
-            <a:endParaRPr lang="en-US" sz="1450" dirty="0"/>
+              <a:rPr lang="en-US" sz="1600" dirty="0">
+                <a:solidFill>
+                  <a:srgbClr val="000000"/>
+                </a:solidFill>
+                <a:latin typeface="Times New Roman" pitchFamily="34" charset="0"/>
+                <a:ea typeface="Times New Roman" pitchFamily="34" charset="-122"/>
+                <a:cs typeface="Times New Roman" pitchFamily="34" charset="-120"/>
+              </a:rPr>
+              <a:t>The advantage is not an artefact of training: 97.45 % on OSNR levels never seen, and it holds on captures eight times shorter.</a:t>
+            </a:r>
+            <a:endParaRPr lang="en-US" sz="1600" dirty="0"/>
+          </a:p>
+          <a:p>
+            <a:pPr marL="342900" indent="-342900">
+              <a:spcAft>
+                <a:spcPts val="900"/>
+              </a:spcAft>
+              <a:buSzPct val="100000"/>
+              <a:buChar char="▪"/>
+            </a:pPr>
+            <a:r>
+              <a:rPr lang="en-US" sz="1600" dirty="0">
+                <a:solidFill>
+                  <a:srgbClr val="000000"/>
+                </a:solidFill>
+                <a:latin typeface="Times New Roman" pitchFamily="34" charset="0"/>
+                <a:ea typeface="Times New Roman" pitchFamily="34" charset="-122"/>
+                <a:cs typeface="Times New Roman" pitchFamily="34" charset="-120"/>
+              </a:rPr>
+              <a:t>The simulator is validated against exact analytic cumulants, and every reported number is recomputed from saved weights by an independent script.</a:t>
+            </a:r>
+            <a:endParaRPr lang="en-US" sz="1600" dirty="0"/>
+          </a:p>
+          <a:p>
+            <a:pPr marL="342900" indent="-342900">
+              <a:spcAft>
+                <a:spcPts val="900"/>
+              </a:spcAft>
+              <a:buSzPct val="100000"/>
+              <a:buChar char="▪"/>
+            </a:pPr>
+            <a:r>
+              <a:rPr lang="en-US" sz="1600" b="1" dirty="0">
+                <a:solidFill>
+                  <a:srgbClr val="000000"/>
+                </a:solidFill>
+                <a:latin typeface="Times New Roman" pitchFamily="34" charset="0"/>
+                <a:ea typeface="Times New Roman" pitchFamily="34" charset="-122"/>
+                <a:cs typeface="Times New Roman" pitchFamily="34" charset="-120"/>
+              </a:rPr>
+              <a:t>Phase 1 has answered the question we set. Phase 2 examines where the advantage breaks down, and why.</a:t>
+            </a:r>
+            <a:endParaRPr lang="en-US" sz="1600" dirty="0"/>
           </a:p>
         </p:txBody>
       </p:sp>
@@ -2739,7 +2667,7 @@
                 <a:ea typeface="Times New Roman" pitchFamily="34" charset="-122"/>
                 <a:cs typeface="Times New Roman" pitchFamily="34" charset="-120"/>
               </a:rPr>
-              <a:t>CONCLUSIONS</a:t>
+              <a:t>PUBLICATION</a:t>
             </a:r>
             <a:endParaRPr lang="en-US" sz="3200" dirty="0"/>
           </a:p>
@@ -2831,7 +2759,7 @@
         </p:nvSpPr>
         <p:spPr>
           <a:xfrm>
-            <a:off x="548640" y="1097280"/>
+            <a:off x="548640" y="1143000"/>
             <a:ext cx="8046720" cy="5120640"/>
           </a:xfrm>
           <a:prstGeom prst="rect">
@@ -2852,15 +2780,15 @@
               <a:buChar char="▪"/>
             </a:pPr>
             <a:r>
-              <a:rPr lang="en-US" sz="1600" b="1" dirty="0">
-                <a:solidFill>
-                  <a:srgbClr val="000000"/>
-                </a:solidFill>
-                <a:latin typeface="Times New Roman" pitchFamily="34" charset="0"/>
-                <a:ea typeface="Times New Roman" pitchFamily="34" charset="-122"/>
-                <a:cs typeface="Times New Roman" pitchFamily="34" charset="-120"/>
-              </a:rPr>
-              <a:t>The input representation, not the learning algorithm, is the dominant design variable in optical MFI — worth 2.9× as much on matched channels.</a:t>
+              <a:rPr lang="en-US" sz="1600" dirty="0">
+                <a:solidFill>
+                  <a:srgbClr val="000000"/>
+                </a:solidFill>
+                <a:latin typeface="Times New Roman" pitchFamily="34" charset="0"/>
+                <a:ea typeface="Times New Roman" pitchFamily="34" charset="-122"/>
+                <a:cs typeface="Times New Roman" pitchFamily="34" charset="-120"/>
+              </a:rPr>
+              <a:t>Manuscript complete in IEEE conference format: 8 pages, 9 figures, 10 references, compiles clean with zero overfull boxes.</a:t>
             </a:r>
             <a:endParaRPr lang="en-US" sz="1600" dirty="0"/>
           </a:p>
@@ -2881,7 +2809,7 @@
                 <a:ea typeface="Times New Roman" pitchFamily="34" charset="-122"/>
                 <a:cs typeface="Times New Roman" pitchFamily="34" charset="-120"/>
               </a:rPr>
-              <a:t>Three very different algorithms on identical features perform within 1.83 points of one another. Adding depth to the feature pipeline bought nothing.</a:t>
+              <a:t>Title: “Input Representation Dominates Model Choice in Machine-Learning Modulation Format Identification”.</a:t>
             </a:r>
             <a:endParaRPr lang="en-US" sz="1600" dirty="0"/>
           </a:p>
@@ -2894,15 +2822,15 @@
               <a:buChar char="▪"/>
             </a:pPr>
             <a:r>
-              <a:rPr lang="en-US" sz="1600" dirty="0">
-                <a:solidFill>
-                  <a:srgbClr val="000000"/>
-                </a:solidFill>
-                <a:latin typeface="Times New Roman" pitchFamily="34" charset="0"/>
-                <a:ea typeface="Times New Roman" pitchFamily="34" charset="-122"/>
-                <a:cs typeface="Times New Roman" pitchFamily="34" charset="-120"/>
-              </a:rPr>
-              <a:t>The advantage widens sharply under channel mismatch: 89.8 % against 21.8 %, where 20 % is chance.</a:t>
+              <a:rPr lang="en-US" sz="1600" b="1" dirty="0">
+                <a:solidFill>
+                  <a:srgbClr val="000000"/>
+                </a:solidFill>
+                <a:latin typeface="Times New Roman" pitchFamily="34" charset="0"/>
+                <a:ea typeface="Times New Roman" pitchFamily="34" charset="-122"/>
+                <a:cs typeface="Times New Roman" pitchFamily="34" charset="-120"/>
+              </a:rPr>
+              <a:t>Target venue: QPAIN 2027 — IEEE 3rd International Conference on Quantum Photonics, AI and Networking. Submission deadline 30 November 2026.</a:t>
             </a:r>
             <a:endParaRPr lang="en-US" sz="1600" dirty="0"/>
           </a:p>
@@ -2923,7 +2851,7 @@
                 <a:ea typeface="Times New Roman" pitchFamily="34" charset="-122"/>
                 <a:cs typeface="Times New Roman" pitchFamily="34" charset="-120"/>
               </a:rPr>
-              <a:t>The representation also governs whether a confidence-gated monitor stays operational at all — 86.9 % coverage against 0.2 %.</a:t>
+              <a:t>IEEE Photonics Society sponsored; indexed in IEEE Xplore and Scopus. Backup venue: PHOTOPTICS.</a:t>
             </a:r>
             <a:endParaRPr lang="en-US" sz="1600" dirty="0"/>
           </a:p>
@@ -2944,7 +2872,7 @@
                 <a:ea typeface="Times New Roman" pitchFamily="34" charset="-122"/>
                 <a:cs typeface="Times New Roman" pitchFamily="34" charset="-120"/>
               </a:rPr>
-              <a:t>The simulator is validated against exact analytic cumulants, and every reported number is recomputed from saved weights by an independent script.</a:t>
+              <a:t>Status: not yet submitted. Remaining work is a trim from 8 pages to the 4–6 page limit.</a:t>
             </a:r>
             <a:endParaRPr lang="en-US" sz="1600" dirty="0"/>
           </a:p>
@@ -2965,7 +2893,7 @@
                 <a:ea typeface="Times New Roman" pitchFamily="34" charset="-122"/>
                 <a:cs typeface="Times New Roman" pitchFamily="34" charset="-120"/>
               </a:rPr>
-              <a:t>Limits stated plainly: simulation only, single polarisation, linear channel, fixed symbol rate, five formats — and dispersion favours the hand-crafted features.</a:t>
+              <a:t>Code and data-generation scripts are public at github.com/techi101/optical-mfi-representation; every number regenerates from a fixed seed.</a:t>
             </a:r>
             <a:endParaRPr lang="en-US" sz="1600" dirty="0"/>
           </a:p>
@@ -3029,7 +2957,7 @@
                 <a:ea typeface="Times New Roman" pitchFamily="34" charset="-122"/>
                 <a:cs typeface="Times New Roman" pitchFamily="34" charset="-120"/>
               </a:rPr>
-              <a:t>PUBLICATION</a:t>
+              <a:t>REFERENCES</a:t>
             </a:r>
             <a:endParaRPr lang="en-US" sz="3200" dirty="0"/>
           </a:p>
@@ -3108,296 +3036,6 @@
                 <a:cs typeface="Arial" pitchFamily="34" charset="-120"/>
               </a:rPr>
               <a:t>11</a:t>
-            </a:r>
-            <a:endParaRPr lang="en-US" sz="1100" dirty="0"/>
-          </a:p>
-        </p:txBody>
-      </p:sp>
-      <p:sp>
-        <p:nvSpPr>
-          <p:cNvPr id="5" name="Text 3"/>
-          <p:cNvSpPr txBox="1"/>
-          <p:nvPr/>
-        </p:nvSpPr>
-        <p:spPr>
-          <a:xfrm>
-            <a:off x="548640" y="1143000"/>
-            <a:ext cx="8046720" cy="5120640"/>
-          </a:xfrm>
-          <a:prstGeom prst="rect">
-            <a:avLst/>
-          </a:prstGeom>
-          <a:noFill/>
-          <a:ln/>
-        </p:spPr>
-        <p:txBody>
-          <a:bodyPr wrap="square" rtlCol="0" anchor="t"/>
-          <a:lstStyle/>
-          <a:p>
-            <a:pPr marL="342900" indent="-342900">
-              <a:spcAft>
-                <a:spcPts val="900"/>
-              </a:spcAft>
-              <a:buSzPct val="100000"/>
-              <a:buChar char="▪"/>
-            </a:pPr>
-            <a:r>
-              <a:rPr lang="en-US" sz="1600" dirty="0">
-                <a:solidFill>
-                  <a:srgbClr val="000000"/>
-                </a:solidFill>
-                <a:latin typeface="Times New Roman" pitchFamily="34" charset="0"/>
-                <a:ea typeface="Times New Roman" pitchFamily="34" charset="-122"/>
-                <a:cs typeface="Times New Roman" pitchFamily="34" charset="-120"/>
-              </a:rPr>
-              <a:t>Manuscript complete in IEEE conference format: 8 pages, 9 figures, 10 references, compiles clean with zero overfull boxes.</a:t>
-            </a:r>
-            <a:endParaRPr lang="en-US" sz="1600" dirty="0"/>
-          </a:p>
-          <a:p>
-            <a:pPr marL="342900" indent="-342900">
-              <a:spcAft>
-                <a:spcPts val="900"/>
-              </a:spcAft>
-              <a:buSzPct val="100000"/>
-              <a:buChar char="▪"/>
-            </a:pPr>
-            <a:r>
-              <a:rPr lang="en-US" sz="1600" dirty="0">
-                <a:solidFill>
-                  <a:srgbClr val="000000"/>
-                </a:solidFill>
-                <a:latin typeface="Times New Roman" pitchFamily="34" charset="0"/>
-                <a:ea typeface="Times New Roman" pitchFamily="34" charset="-122"/>
-                <a:cs typeface="Times New Roman" pitchFamily="34" charset="-120"/>
-              </a:rPr>
-              <a:t>Title: “Input Representation Dominates Model Choice in Machine-Learning Modulation Format Identification”.</a:t>
-            </a:r>
-            <a:endParaRPr lang="en-US" sz="1600" dirty="0"/>
-          </a:p>
-          <a:p>
-            <a:pPr marL="342900" indent="-342900">
-              <a:spcAft>
-                <a:spcPts val="900"/>
-              </a:spcAft>
-              <a:buSzPct val="100000"/>
-              <a:buChar char="▪"/>
-            </a:pPr>
-            <a:r>
-              <a:rPr lang="en-US" sz="1600" b="1" dirty="0">
-                <a:solidFill>
-                  <a:srgbClr val="000000"/>
-                </a:solidFill>
-                <a:latin typeface="Times New Roman" pitchFamily="34" charset="0"/>
-                <a:ea typeface="Times New Roman" pitchFamily="34" charset="-122"/>
-                <a:cs typeface="Times New Roman" pitchFamily="34" charset="-120"/>
-              </a:rPr>
-              <a:t>Target venue: QPAIN 2027 — IEEE 3rd International Conference on Quantum Photonics, AI and Networking. Submission deadline 30 November 2026.</a:t>
-            </a:r>
-            <a:endParaRPr lang="en-US" sz="1600" dirty="0"/>
-          </a:p>
-          <a:p>
-            <a:pPr marL="342900" indent="-342900">
-              <a:spcAft>
-                <a:spcPts val="900"/>
-              </a:spcAft>
-              <a:buSzPct val="100000"/>
-              <a:buChar char="▪"/>
-            </a:pPr>
-            <a:r>
-              <a:rPr lang="en-US" sz="1600" dirty="0">
-                <a:solidFill>
-                  <a:srgbClr val="000000"/>
-                </a:solidFill>
-                <a:latin typeface="Times New Roman" pitchFamily="34" charset="0"/>
-                <a:ea typeface="Times New Roman" pitchFamily="34" charset="-122"/>
-                <a:cs typeface="Times New Roman" pitchFamily="34" charset="-120"/>
-              </a:rPr>
-              <a:t>IEEE Photonics Society sponsored; indexed in IEEE Xplore and Scopus. Backup venue: PHOTOPTICS.</a:t>
-            </a:r>
-            <a:endParaRPr lang="en-US" sz="1600" dirty="0"/>
-          </a:p>
-          <a:p>
-            <a:pPr marL="342900" indent="-342900">
-              <a:spcAft>
-                <a:spcPts val="900"/>
-              </a:spcAft>
-              <a:buSzPct val="100000"/>
-              <a:buChar char="▪"/>
-            </a:pPr>
-            <a:r>
-              <a:rPr lang="en-US" sz="1600" dirty="0">
-                <a:solidFill>
-                  <a:srgbClr val="000000"/>
-                </a:solidFill>
-                <a:latin typeface="Times New Roman" pitchFamily="34" charset="0"/>
-                <a:ea typeface="Times New Roman" pitchFamily="34" charset="-122"/>
-                <a:cs typeface="Times New Roman" pitchFamily="34" charset="-120"/>
-              </a:rPr>
-              <a:t>Status: not yet submitted. Remaining work is a trim from 8 pages to the 4–6 page limit.</a:t>
-            </a:r>
-            <a:endParaRPr lang="en-US" sz="1600" dirty="0"/>
-          </a:p>
-          <a:p>
-            <a:pPr marL="342900" indent="-342900">
-              <a:spcAft>
-                <a:spcPts val="900"/>
-              </a:spcAft>
-              <a:buSzPct val="100000"/>
-              <a:buChar char="▪"/>
-            </a:pPr>
-            <a:r>
-              <a:rPr lang="en-US" sz="1600" dirty="0">
-                <a:solidFill>
-                  <a:srgbClr val="000000"/>
-                </a:solidFill>
-                <a:latin typeface="Times New Roman" pitchFamily="34" charset="0"/>
-                <a:ea typeface="Times New Roman" pitchFamily="34" charset="-122"/>
-                <a:cs typeface="Times New Roman" pitchFamily="34" charset="-120"/>
-              </a:rPr>
-              <a:t>Code and data-generation scripts are public at github.com/techi101/optical-mfi-representation; every number regenerates from a fixed seed.</a:t>
-            </a:r>
-            <a:endParaRPr lang="en-US" sz="1600" dirty="0"/>
-          </a:p>
-        </p:txBody>
-      </p:sp>
-    </p:spTree>
-  </p:cSld>
-  <p:clrMapOvr>
-    <a:masterClrMapping/>
-  </p:clrMapOvr>
-</p:sld>
-</file>
-
-<file path=ppt/slides/slide13.xml><?xml version="1.0" encoding="utf-8"?>
-<p:sld xmlns:a="http://schemas.openxmlformats.org/drawingml/2006/main" xmlns:r="http://schemas.openxmlformats.org/officeDocument/2006/relationships" xmlns:p="http://schemas.openxmlformats.org/presentationml/2006/main">
-  <p:cSld name="Slide 13">
-    <p:spTree>
-      <p:nvGrpSpPr>
-        <p:cNvPr id="1" name=""/>
-        <p:cNvGrpSpPr/>
-        <p:nvPr/>
-      </p:nvGrpSpPr>
-      <p:grpSpPr>
-        <a:xfrm>
-          <a:off x="0" y="0"/>
-          <a:ext cx="0" cy="0"/>
-          <a:chOff x="0" y="0"/>
-          <a:chExt cx="0" cy="0"/>
-        </a:xfrm>
-      </p:grpSpPr>
-      <p:sp>
-        <p:nvSpPr>
-          <p:cNvPr id="2" name="Text 0"/>
-          <p:cNvSpPr txBox="1"/>
-          <p:nvPr/>
-        </p:nvSpPr>
-        <p:spPr>
-          <a:xfrm>
-            <a:off x="274320" y="164592"/>
-            <a:ext cx="8595360" cy="658368"/>
-          </a:xfrm>
-          <a:prstGeom prst="rect">
-            <a:avLst/>
-          </a:prstGeom>
-          <a:noFill/>
-          <a:ln/>
-        </p:spPr>
-        <p:txBody>
-          <a:bodyPr wrap="square" rtlCol="0" anchor="ctr"/>
-          <a:lstStyle/>
-          <a:p>
-            <a:pPr algn="ctr" indent="0" marL="0">
-              <a:buNone/>
-            </a:pPr>
-            <a:r>
-              <a:rPr lang="en-US" sz="3200" b="1" dirty="0">
-                <a:solidFill>
-                  <a:srgbClr val="0070C0"/>
-                </a:solidFill>
-                <a:latin typeface="Times New Roman" pitchFamily="34" charset="0"/>
-                <a:ea typeface="Times New Roman" pitchFamily="34" charset="-122"/>
-                <a:cs typeface="Times New Roman" pitchFamily="34" charset="-120"/>
-              </a:rPr>
-              <a:t>REFERENCES</a:t>
-            </a:r>
-            <a:endParaRPr lang="en-US" sz="3200" dirty="0"/>
-          </a:p>
-        </p:txBody>
-      </p:sp>
-      <p:sp>
-        <p:nvSpPr>
-          <p:cNvPr id="3" name="Text 1"/>
-          <p:cNvSpPr txBox="1"/>
-          <p:nvPr/>
-        </p:nvSpPr>
-        <p:spPr>
-          <a:xfrm>
-            <a:off x="2743200" y="6446520"/>
-            <a:ext cx="3657600" cy="274320"/>
-          </a:xfrm>
-          <a:prstGeom prst="rect">
-            <a:avLst/>
-          </a:prstGeom>
-          <a:noFill/>
-          <a:ln/>
-        </p:spPr>
-        <p:txBody>
-          <a:bodyPr wrap="square" rtlCol="0" anchor="ctr"/>
-          <a:lstStyle/>
-          <a:p>
-            <a:pPr algn="ctr" indent="0" marL="0">
-              <a:buNone/>
-            </a:pPr>
-            <a:r>
-              <a:rPr lang="en-US" sz="1100" dirty="0">
-                <a:solidFill>
-                  <a:srgbClr val="808080"/>
-                </a:solidFill>
-                <a:latin typeface="Arial" pitchFamily="34" charset="0"/>
-                <a:ea typeface="Arial" pitchFamily="34" charset="-122"/>
-                <a:cs typeface="Arial" pitchFamily="34" charset="-120"/>
-              </a:rPr>
-              <a:t>MEMEC702 MSE</a:t>
-            </a:r>
-            <a:endParaRPr lang="en-US" sz="1100" dirty="0"/>
-          </a:p>
-        </p:txBody>
-      </p:sp>
-      <p:sp>
-        <p:nvSpPr>
-          <p:cNvPr id="4" name="Text 2"/>
-          <p:cNvSpPr txBox="1"/>
-          <p:nvPr/>
-        </p:nvSpPr>
-        <p:spPr>
-          <a:xfrm>
-            <a:off x="8229600" y="6446520"/>
-            <a:ext cx="640080" cy="274320"/>
-          </a:xfrm>
-          <a:prstGeom prst="rect">
-            <a:avLst/>
-          </a:prstGeom>
-          <a:noFill/>
-          <a:ln/>
-        </p:spPr>
-        <p:txBody>
-          <a:bodyPr wrap="square" rtlCol="0" anchor="ctr"/>
-          <a:lstStyle/>
-          <a:p>
-            <a:pPr algn="r" indent="0" marL="0">
-              <a:buNone/>
-            </a:pPr>
-            <a:r>
-              <a:rPr lang="en-US" sz="1100" dirty="0">
-                <a:solidFill>
-                  <a:srgbClr val="808080"/>
-                </a:solidFill>
-                <a:latin typeface="Arial" pitchFamily="34" charset="0"/>
-                <a:ea typeface="Arial" pitchFamily="34" charset="-122"/>
-                <a:cs typeface="Arial" pitchFamily="34" charset="-120"/>
-              </a:rPr>
-              <a:t>12</a:t>
             </a:r>
             <a:endParaRPr lang="en-US" sz="1100" dirty="0"/>
           </a:p>
@@ -6259,7 +5897,7 @@
                 <a:ea typeface="Times New Roman" pitchFamily="34" charset="-122"/>
                 <a:cs typeface="Times New Roman" pitchFamily="34" charset="-120"/>
               </a:rPr>
-              <a:t>RESULTS — THE MAIN COMPARISON</a:t>
+              <a:t>RESULTS</a:t>
             </a:r>
             <a:endParaRPr lang="en-US" sz="3200" dirty="0"/>
           </a:p>
@@ -6359,8 +5997,8 @@
         </p:blipFill>
         <p:spPr>
           <a:xfrm>
-            <a:off x="685800" y="914400"/>
-            <a:ext cx="7772400" cy="4297680"/>
+            <a:off x="1737360" y="896112"/>
+            <a:ext cx="5669280" cy="3136392"/>
           </a:xfrm>
           <a:prstGeom prst="rect">
             <a:avLst/>
@@ -6375,8 +6013,8 @@
         </p:nvSpPr>
         <p:spPr>
           <a:xfrm>
-            <a:off x="548640" y="5303520"/>
-            <a:ext cx="8046720" cy="1097280"/>
+            <a:off x="502920" y="4133088"/>
+            <a:ext cx="8138160" cy="2194560"/>
           </a:xfrm>
           <a:prstGeom prst="rect">
             <a:avLst/>
@@ -6390,13 +6028,13 @@
           <a:p>
             <a:pPr marL="342900" indent="-342900">
               <a:spcAft>
-                <a:spcPts val="400"/>
+                <a:spcPts val="500"/>
               </a:spcAft>
               <a:buSzPct val="100000"/>
               <a:buChar char="▪"/>
             </a:pPr>
             <a:r>
-              <a:rPr lang="en-US" sz="1450" dirty="0">
+              <a:rPr lang="en-US" sz="1350" dirty="0">
                 <a:solidFill>
                   <a:srgbClr val="000000"/>
                 </a:solidFill>
@@ -6406,49 +6044,91 @@
               </a:rPr>
               <a:t>Algorithm effect: 1.83 points — the spread across MLP, SVM and k-NN on identical features.</a:t>
             </a:r>
-            <a:endParaRPr lang="en-US" sz="1450" dirty="0"/>
+            <a:endParaRPr lang="en-US" sz="1350" dirty="0"/>
           </a:p>
           <a:p>
             <a:pPr marL="342900" indent="-342900">
               <a:spcAft>
-                <a:spcPts val="400"/>
+                <a:spcPts val="500"/>
               </a:spcAft>
               <a:buSzPct val="100000"/>
               <a:buChar char="▪"/>
             </a:pPr>
             <a:r>
-              <a:rPr lang="en-US" sz="1450" b="1" dirty="0">
-                <a:solidFill>
-                  <a:srgbClr val="000000"/>
-                </a:solidFill>
-                <a:latin typeface="Times New Roman" pitchFamily="34" charset="0"/>
-                <a:ea typeface="Times New Roman" pitchFamily="34" charset="-122"/>
-                <a:cs typeface="Times New Roman" pitchFamily="34" charset="-120"/>
-              </a:rPr>
-              <a:t>Representation effect: 5.32 points — the CNN over the strongest of them (the SVM). That is 2.9× larger.</a:t>
-            </a:r>
-            <a:endParaRPr lang="en-US" sz="1450" dirty="0"/>
+              <a:rPr lang="en-US" sz="1350" b="1" dirty="0">
+                <a:solidFill>
+                  <a:srgbClr val="000000"/>
+                </a:solidFill>
+                <a:latin typeface="Times New Roman" pitchFamily="34" charset="0"/>
+                <a:ea typeface="Times New Roman" pitchFamily="34" charset="-122"/>
+                <a:cs typeface="Times New Roman" pitchFamily="34" charset="-120"/>
+              </a:rPr>
+              <a:t>Representation effect: 5.32 points — the CNN over the strongest of them. 2.9× larger.</a:t>
+            </a:r>
+            <a:endParaRPr lang="en-US" sz="1350" dirty="0"/>
           </a:p>
           <a:p>
             <a:pPr marL="342900" indent="-342900">
               <a:spcAft>
-                <a:spcPts val="400"/>
+                <a:spcPts val="500"/>
               </a:spcAft>
               <a:buSzPct val="100000"/>
               <a:buChar char="▪"/>
             </a:pPr>
             <a:r>
-              <a:rPr lang="en-US" sz="1450" dirty="0">
-                <a:solidFill>
-                  <a:srgbClr val="000000"/>
-                </a:solidFill>
-                <a:latin typeface="Times New Roman" pitchFamily="34" charset="0"/>
-                <a:ea typeface="Times New Roman" pitchFamily="34" charset="-122"/>
-                <a:cs typeface="Times New Roman" pitchFamily="34" charset="-120"/>
-              </a:rPr>
-              <a:t>The MLP, a deep network, finished below the SVM, a shallow one: depth on features bought nothing.</a:t>
-            </a:r>
-            <a:endParaRPr lang="en-US" sz="1450" dirty="0"/>
+              <a:rPr lang="en-US" sz="1350" dirty="0">
+                <a:solidFill>
+                  <a:srgbClr val="000000"/>
+                </a:solidFill>
+                <a:latin typeface="Times New Roman" pitchFamily="34" charset="0"/>
+                <a:ea typeface="Times New Roman" pitchFamily="34" charset="-122"/>
+                <a:cs typeface="Times New Roman" pitchFamily="34" charset="-120"/>
+              </a:rPr>
+              <a:t>A 7 dB OSNR margin: the CNN reaches 95 % at 7 dB where the SVM needs 14 dB.</a:t>
+            </a:r>
+            <a:endParaRPr lang="en-US" sz="1350" dirty="0"/>
+          </a:p>
+          <a:p>
+            <a:pPr marL="342900" indent="-342900">
+              <a:spcAft>
+                <a:spcPts val="500"/>
+              </a:spcAft>
+              <a:buSzPct val="100000"/>
+              <a:buChar char="▪"/>
+            </a:pPr>
+            <a:r>
+              <a:rPr lang="en-US" sz="1350" dirty="0">
+                <a:solidFill>
+                  <a:srgbClr val="000000"/>
+                </a:solidFill>
+                <a:latin typeface="Times New Roman" pitchFamily="34" charset="0"/>
+                <a:ea typeface="Times New Roman" pitchFamily="34" charset="-122"/>
+                <a:cs typeface="Times New Roman" pitchFamily="34" charset="-120"/>
+              </a:rPr>
+              <a:t>Generalisation: 97.45 ± 0.16 % on OSNR levels withheld from training — it learned the physics, not the noise levels.</a:t>
+            </a:r>
+            <a:endParaRPr lang="en-US" sz="1350" dirty="0"/>
+          </a:p>
+          <a:p>
+            <a:pPr marL="342900" indent="-342900">
+              <a:spcAft>
+                <a:spcPts val="500"/>
+              </a:spcAft>
+              <a:buSzPct val="100000"/>
+              <a:buChar char="▪"/>
+            </a:pPr>
+            <a:r>
+              <a:rPr lang="en-US" sz="1350" dirty="0">
+                <a:solidFill>
+                  <a:srgbClr val="000000"/>
+                </a:solidFill>
+                <a:latin typeface="Times New Roman" pitchFamily="34" charset="0"/>
+                <a:ea typeface="Times New Roman" pitchFamily="34" charset="-122"/>
+                <a:cs typeface="Times New Roman" pitchFamily="34" charset="-120"/>
+              </a:rPr>
+              <a:t>Capture length: the CNN with 512 symbols (94.08 %) beats the SVM with 4096 (93.82 %).</a:t>
+            </a:r>
+            <a:endParaRPr lang="en-US" sz="1350" dirty="0"/>
           </a:p>
         </p:txBody>
       </p:sp>
@@ -6510,7 +6190,7 @@
                 <a:ea typeface="Times New Roman" pitchFamily="34" charset="-122"/>
                 <a:cs typeface="Times New Roman" pitchFamily="34" charset="-120"/>
               </a:rPr>
-              <a:t>RESULTS — MARGIN AND ROBUSTNESS</a:t>
+              <a:t>WORK IN PROGRESS AND NEXT STEPS</a:t>
             </a:r>
             <a:endParaRPr lang="en-US" sz="3200" dirty="0"/>
           </a:p>
@@ -6594,835 +6274,16 @@
           </a:p>
         </p:txBody>
       </p:sp>
-      <p:graphicFrame>
-        <p:nvGraphicFramePr>
-          <p:cNvPr id="10" name="Table 0"/>
-          <p:cNvGraphicFramePr>
-            <a:graphicFrameLocks noGrp="1"/>
-          </p:cNvGraphicFramePr>
-          <p:nvPr>
-            <p:extLst>
-              <p:ext uri="{D42A27DB-BD31-4B8C-83A1-F6EECF244321}">
-                <p14:modId xmlns:p14="http://schemas.microsoft.com/office/powerpoint/2010/main" val="1579011935"/>
-              </p:ext>
-            </p:extLst>
-          </p:nvPr>
-        </p:nvGraphicFramePr>
-        <p:xfrm>
-          <a:off x="502920" y="960120"/>
-          <a:ext cx="3931920" cy="914400"/>
-        </p:xfrm>
-        <a:graphic>
-          <a:graphicData uri="http://schemas.openxmlformats.org/drawingml/2006/table">
-            <a:tbl>
-              <a:tblPr/>
-              <a:tblGrid>
-                <a:gridCol w="1371600"/>
-                <a:gridCol w="1280160"/>
-                <a:gridCol w="1280160"/>
-              </a:tblGrid>
-              <a:tr h="347472">
-                <a:tc>
-                  <a:txBody>
-                    <a:bodyPr/>
-                    <a:lstStyle/>
-                    <a:p>
-                      <a:pPr indent="0" marL="0">
-                        <a:buNone/>
-                      </a:pPr>
-                      <a:r>
-                        <a:rPr lang="en-US" sz="1400" b="1" dirty="0">
-                          <a:solidFill>
-                            <a:srgbClr val="000000"/>
-                          </a:solidFill>
-                          <a:latin typeface="Times New Roman" pitchFamily="34" charset="0"/>
-                          <a:ea typeface="Times New Roman" pitchFamily="34" charset="-122"/>
-                          <a:cs typeface="Times New Roman" pitchFamily="34" charset="-120"/>
-                        </a:rPr>
-                        <a:t>Model</a:t>
-                      </a:r>
-                      <a:endParaRPr lang="en-US" sz="1400" dirty="0">
-                        <a:latin typeface="Times New Roman" charset="0"/>
-                        <a:ea typeface="Times New Roman" charset="0"/>
-                        <a:cs typeface="Times New Roman" charset="0"/>
-                      </a:endParaRPr>
-                    </a:p>
-                  </a:txBody>
-                  <a:tcPr marL="91440" marR="91440" marT="45720" marB="45720" anchor="ctr">
-                    <a:lnL w="12700" cap="flat" cmpd="sng" algn="ctr">
-                      <a:solidFill>
-                        <a:srgbClr val="999999"/>
-                      </a:solidFill>
-                      <a:prstDash val="solid"/>
-                      <a:round/>
-                      <a:headEnd type="none" w="med" len="med"/>
-                      <a:tailEnd type="none" w="med" len="med"/>
-                    </a:lnL>
-                    <a:lnR w="12700" cap="flat" cmpd="sng" algn="ctr">
-                      <a:solidFill>
-                        <a:srgbClr val="999999"/>
-                      </a:solidFill>
-                      <a:prstDash val="solid"/>
-                      <a:round/>
-                      <a:headEnd type="none" w="med" len="med"/>
-                      <a:tailEnd type="none" w="med" len="med"/>
-                    </a:lnR>
-                    <a:lnT w="12700" cap="flat" cmpd="sng" algn="ctr">
-                      <a:solidFill>
-                        <a:srgbClr val="999999"/>
-                      </a:solidFill>
-                      <a:prstDash val="solid"/>
-                      <a:round/>
-                      <a:headEnd type="none" w="med" len="med"/>
-                      <a:tailEnd type="none" w="med" len="med"/>
-                    </a:lnT>
-                    <a:lnB w="12700" cap="flat" cmpd="sng" algn="ctr">
-                      <a:solidFill>
-                        <a:srgbClr val="999999"/>
-                      </a:solidFill>
-                      <a:prstDash val="solid"/>
-                      <a:round/>
-                      <a:headEnd type="none" w="med" len="med"/>
-                      <a:tailEnd type="none" w="med" len="med"/>
-                    </a:lnB>
-                  </a:tcPr>
-                </a:tc>
-                <a:tc>
-                  <a:txBody>
-                    <a:bodyPr/>
-                    <a:lstStyle/>
-                    <a:p>
-                      <a:pPr algn="ctr" indent="0" marL="0">
-                        <a:buNone/>
-                      </a:pPr>
-                      <a:r>
-                        <a:rPr lang="en-US" sz="1400" b="1" dirty="0">
-                          <a:solidFill>
-                            <a:srgbClr val="000000"/>
-                          </a:solidFill>
-                          <a:latin typeface="Times New Roman" pitchFamily="34" charset="0"/>
-                          <a:ea typeface="Times New Roman" pitchFamily="34" charset="-122"/>
-                          <a:cs typeface="Times New Roman" pitchFamily="34" charset="-120"/>
-                        </a:rPr>
-                        <a:t>OSNR for ≥ 95 %</a:t>
-                      </a:r>
-                      <a:endParaRPr lang="en-US" sz="1400" dirty="0">
-                        <a:latin typeface="Times New Roman" charset="0"/>
-                        <a:ea typeface="Times New Roman" charset="0"/>
-                        <a:cs typeface="Times New Roman" charset="0"/>
-                      </a:endParaRPr>
-                    </a:p>
-                  </a:txBody>
-                  <a:tcPr marL="91440" marR="91440" marT="45720" marB="45720" anchor="ctr">
-                    <a:lnL w="12700" cap="flat" cmpd="sng" algn="ctr">
-                      <a:solidFill>
-                        <a:srgbClr val="999999"/>
-                      </a:solidFill>
-                      <a:prstDash val="solid"/>
-                      <a:round/>
-                      <a:headEnd type="none" w="med" len="med"/>
-                      <a:tailEnd type="none" w="med" len="med"/>
-                    </a:lnL>
-                    <a:lnR w="12700" cap="flat" cmpd="sng" algn="ctr">
-                      <a:solidFill>
-                        <a:srgbClr val="999999"/>
-                      </a:solidFill>
-                      <a:prstDash val="solid"/>
-                      <a:round/>
-                      <a:headEnd type="none" w="med" len="med"/>
-                      <a:tailEnd type="none" w="med" len="med"/>
-                    </a:lnR>
-                    <a:lnT w="12700" cap="flat" cmpd="sng" algn="ctr">
-                      <a:solidFill>
-                        <a:srgbClr val="999999"/>
-                      </a:solidFill>
-                      <a:prstDash val="solid"/>
-                      <a:round/>
-                      <a:headEnd type="none" w="med" len="med"/>
-                      <a:tailEnd type="none" w="med" len="med"/>
-                    </a:lnT>
-                    <a:lnB w="12700" cap="flat" cmpd="sng" algn="ctr">
-                      <a:solidFill>
-                        <a:srgbClr val="999999"/>
-                      </a:solidFill>
-                      <a:prstDash val="solid"/>
-                      <a:round/>
-                      <a:headEnd type="none" w="med" len="med"/>
-                      <a:tailEnd type="none" w="med" len="med"/>
-                    </a:lnB>
-                  </a:tcPr>
-                </a:tc>
-                <a:tc>
-                  <a:txBody>
-                    <a:bodyPr/>
-                    <a:lstStyle/>
-                    <a:p>
-                      <a:pPr algn="ctr" indent="0" marL="0">
-                        <a:buNone/>
-                      </a:pPr>
-                      <a:r>
-                        <a:rPr lang="en-US" sz="1400" b="1" dirty="0">
-                          <a:solidFill>
-                            <a:srgbClr val="000000"/>
-                          </a:solidFill>
-                          <a:latin typeface="Times New Roman" pitchFamily="34" charset="0"/>
-                          <a:ea typeface="Times New Roman" pitchFamily="34" charset="-122"/>
-                          <a:cs typeface="Times New Roman" pitchFamily="34" charset="-120"/>
-                        </a:rPr>
-                        <a:t>OSNR for ≥ 99 %</a:t>
-                      </a:r>
-                      <a:endParaRPr lang="en-US" sz="1400" dirty="0">
-                        <a:latin typeface="Times New Roman" charset="0"/>
-                        <a:ea typeface="Times New Roman" charset="0"/>
-                        <a:cs typeface="Times New Roman" charset="0"/>
-                      </a:endParaRPr>
-                    </a:p>
-                  </a:txBody>
-                  <a:tcPr marL="91440" marR="91440" marT="45720" marB="45720" anchor="ctr">
-                    <a:lnL w="12700" cap="flat" cmpd="sng" algn="ctr">
-                      <a:solidFill>
-                        <a:srgbClr val="999999"/>
-                      </a:solidFill>
-                      <a:prstDash val="solid"/>
-                      <a:round/>
-                      <a:headEnd type="none" w="med" len="med"/>
-                      <a:tailEnd type="none" w="med" len="med"/>
-                    </a:lnL>
-                    <a:lnR w="12700" cap="flat" cmpd="sng" algn="ctr">
-                      <a:solidFill>
-                        <a:srgbClr val="999999"/>
-                      </a:solidFill>
-                      <a:prstDash val="solid"/>
-                      <a:round/>
-                      <a:headEnd type="none" w="med" len="med"/>
-                      <a:tailEnd type="none" w="med" len="med"/>
-                    </a:lnR>
-                    <a:lnT w="12700" cap="flat" cmpd="sng" algn="ctr">
-                      <a:solidFill>
-                        <a:srgbClr val="999999"/>
-                      </a:solidFill>
-                      <a:prstDash val="solid"/>
-                      <a:round/>
-                      <a:headEnd type="none" w="med" len="med"/>
-                      <a:tailEnd type="none" w="med" len="med"/>
-                    </a:lnT>
-                    <a:lnB w="12700" cap="flat" cmpd="sng" algn="ctr">
-                      <a:solidFill>
-                        <a:srgbClr val="999999"/>
-                      </a:solidFill>
-                      <a:prstDash val="solid"/>
-                      <a:round/>
-                      <a:headEnd type="none" w="med" len="med"/>
-                      <a:tailEnd type="none" w="med" len="med"/>
-                    </a:lnB>
-                  </a:tcPr>
-                </a:tc>
-              </a:tr>
-              <a:tr h="347472">
-                <a:tc>
-                  <a:txBody>
-                    <a:bodyPr/>
-                    <a:lstStyle/>
-                    <a:p>
-                      <a:pPr indent="0" marL="0">
-                        <a:buNone/>
-                      </a:pPr>
-                      <a:r>
-                        <a:rPr lang="en-US" sz="1400" dirty="0">
-                          <a:solidFill>
-                            <a:srgbClr val="000000"/>
-                          </a:solidFill>
-                          <a:latin typeface="Times New Roman" pitchFamily="34" charset="0"/>
-                          <a:ea typeface="Times New Roman" pitchFamily="34" charset="-122"/>
-                          <a:cs typeface="Times New Roman" pitchFamily="34" charset="-120"/>
-                        </a:rPr>
-                        <a:t>CNN</a:t>
-                      </a:r>
-                      <a:endParaRPr lang="en-US" sz="1400" dirty="0">
-                        <a:latin typeface="Times New Roman" charset="0"/>
-                        <a:ea typeface="Times New Roman" charset="0"/>
-                        <a:cs typeface="Times New Roman" charset="0"/>
-                      </a:endParaRPr>
-                    </a:p>
-                  </a:txBody>
-                  <a:tcPr marL="91440" marR="91440" marT="45720" marB="45720" anchor="ctr">
-                    <a:lnL w="12700" cap="flat" cmpd="sng" algn="ctr">
-                      <a:solidFill>
-                        <a:srgbClr val="999999"/>
-                      </a:solidFill>
-                      <a:prstDash val="solid"/>
-                      <a:round/>
-                      <a:headEnd type="none" w="med" len="med"/>
-                      <a:tailEnd type="none" w="med" len="med"/>
-                    </a:lnL>
-                    <a:lnR w="12700" cap="flat" cmpd="sng" algn="ctr">
-                      <a:solidFill>
-                        <a:srgbClr val="999999"/>
-                      </a:solidFill>
-                      <a:prstDash val="solid"/>
-                      <a:round/>
-                      <a:headEnd type="none" w="med" len="med"/>
-                      <a:tailEnd type="none" w="med" len="med"/>
-                    </a:lnR>
-                    <a:lnT w="12700" cap="flat" cmpd="sng" algn="ctr">
-                      <a:solidFill>
-                        <a:srgbClr val="999999"/>
-                      </a:solidFill>
-                      <a:prstDash val="solid"/>
-                      <a:round/>
-                      <a:headEnd type="none" w="med" len="med"/>
-                      <a:tailEnd type="none" w="med" len="med"/>
-                    </a:lnT>
-                    <a:lnB w="12700" cap="flat" cmpd="sng" algn="ctr">
-                      <a:solidFill>
-                        <a:srgbClr val="999999"/>
-                      </a:solidFill>
-                      <a:prstDash val="solid"/>
-                      <a:round/>
-                      <a:headEnd type="none" w="med" len="med"/>
-                      <a:tailEnd type="none" w="med" len="med"/>
-                    </a:lnB>
-                  </a:tcPr>
-                </a:tc>
-                <a:tc>
-                  <a:txBody>
-                    <a:bodyPr/>
-                    <a:lstStyle/>
-                    <a:p>
-                      <a:pPr algn="ctr" indent="0" marL="0">
-                        <a:buNone/>
-                      </a:pPr>
-                      <a:r>
-                        <a:rPr lang="en-US" sz="1400" b="1" dirty="0">
-                          <a:solidFill>
-                            <a:srgbClr val="0070C0"/>
-                          </a:solidFill>
-                          <a:latin typeface="Times New Roman" pitchFamily="34" charset="0"/>
-                          <a:ea typeface="Times New Roman" pitchFamily="34" charset="-122"/>
-                          <a:cs typeface="Times New Roman" pitchFamily="34" charset="-120"/>
-                        </a:rPr>
-                        <a:t>7 dB</a:t>
-                      </a:r>
-                      <a:endParaRPr lang="en-US" sz="1400" dirty="0">
-                        <a:latin typeface="Times New Roman" charset="0"/>
-                        <a:ea typeface="Times New Roman" charset="0"/>
-                        <a:cs typeface="Times New Roman" charset="0"/>
-                      </a:endParaRPr>
-                    </a:p>
-                  </a:txBody>
-                  <a:tcPr marL="91440" marR="91440" marT="45720" marB="45720" anchor="ctr">
-                    <a:lnL w="12700" cap="flat" cmpd="sng" algn="ctr">
-                      <a:solidFill>
-                        <a:srgbClr val="999999"/>
-                      </a:solidFill>
-                      <a:prstDash val="solid"/>
-                      <a:round/>
-                      <a:headEnd type="none" w="med" len="med"/>
-                      <a:tailEnd type="none" w="med" len="med"/>
-                    </a:lnL>
-                    <a:lnR w="12700" cap="flat" cmpd="sng" algn="ctr">
-                      <a:solidFill>
-                        <a:srgbClr val="999999"/>
-                      </a:solidFill>
-                      <a:prstDash val="solid"/>
-                      <a:round/>
-                      <a:headEnd type="none" w="med" len="med"/>
-                      <a:tailEnd type="none" w="med" len="med"/>
-                    </a:lnR>
-                    <a:lnT w="12700" cap="flat" cmpd="sng" algn="ctr">
-                      <a:solidFill>
-                        <a:srgbClr val="999999"/>
-                      </a:solidFill>
-                      <a:prstDash val="solid"/>
-                      <a:round/>
-                      <a:headEnd type="none" w="med" len="med"/>
-                      <a:tailEnd type="none" w="med" len="med"/>
-                    </a:lnT>
-                    <a:lnB w="12700" cap="flat" cmpd="sng" algn="ctr">
-                      <a:solidFill>
-                        <a:srgbClr val="999999"/>
-                      </a:solidFill>
-                      <a:prstDash val="solid"/>
-                      <a:round/>
-                      <a:headEnd type="none" w="med" len="med"/>
-                      <a:tailEnd type="none" w="med" len="med"/>
-                    </a:lnB>
-                  </a:tcPr>
-                </a:tc>
-                <a:tc>
-                  <a:txBody>
-                    <a:bodyPr/>
-                    <a:lstStyle/>
-                    <a:p>
-                      <a:pPr algn="ctr" indent="0" marL="0">
-                        <a:buNone/>
-                      </a:pPr>
-                      <a:r>
-                        <a:rPr lang="en-US" sz="1400" dirty="0">
-                          <a:solidFill>
-                            <a:srgbClr val="000000"/>
-                          </a:solidFill>
-                          <a:latin typeface="Times New Roman" pitchFamily="34" charset="0"/>
-                          <a:ea typeface="Times New Roman" pitchFamily="34" charset="-122"/>
-                          <a:cs typeface="Times New Roman" pitchFamily="34" charset="-120"/>
-                        </a:rPr>
-                        <a:t>10 dB</a:t>
-                      </a:r>
-                      <a:endParaRPr lang="en-US" sz="1400" dirty="0">
-                        <a:latin typeface="Times New Roman" charset="0"/>
-                        <a:ea typeface="Times New Roman" charset="0"/>
-                        <a:cs typeface="Times New Roman" charset="0"/>
-                      </a:endParaRPr>
-                    </a:p>
-                  </a:txBody>
-                  <a:tcPr marL="91440" marR="91440" marT="45720" marB="45720" anchor="ctr">
-                    <a:lnL w="12700" cap="flat" cmpd="sng" algn="ctr">
-                      <a:solidFill>
-                        <a:srgbClr val="999999"/>
-                      </a:solidFill>
-                      <a:prstDash val="solid"/>
-                      <a:round/>
-                      <a:headEnd type="none" w="med" len="med"/>
-                      <a:tailEnd type="none" w="med" len="med"/>
-                    </a:lnL>
-                    <a:lnR w="12700" cap="flat" cmpd="sng" algn="ctr">
-                      <a:solidFill>
-                        <a:srgbClr val="999999"/>
-                      </a:solidFill>
-                      <a:prstDash val="solid"/>
-                      <a:round/>
-                      <a:headEnd type="none" w="med" len="med"/>
-                      <a:tailEnd type="none" w="med" len="med"/>
-                    </a:lnR>
-                    <a:lnT w="12700" cap="flat" cmpd="sng" algn="ctr">
-                      <a:solidFill>
-                        <a:srgbClr val="999999"/>
-                      </a:solidFill>
-                      <a:prstDash val="solid"/>
-                      <a:round/>
-                      <a:headEnd type="none" w="med" len="med"/>
-                      <a:tailEnd type="none" w="med" len="med"/>
-                    </a:lnT>
-                    <a:lnB w="12700" cap="flat" cmpd="sng" algn="ctr">
-                      <a:solidFill>
-                        <a:srgbClr val="999999"/>
-                      </a:solidFill>
-                      <a:prstDash val="solid"/>
-                      <a:round/>
-                      <a:headEnd type="none" w="med" len="med"/>
-                      <a:tailEnd type="none" w="med" len="med"/>
-                    </a:lnB>
-                  </a:tcPr>
-                </a:tc>
-              </a:tr>
-              <a:tr h="347472">
-                <a:tc>
-                  <a:txBody>
-                    <a:bodyPr/>
-                    <a:lstStyle/>
-                    <a:p>
-                      <a:pPr indent="0" marL="0">
-                        <a:buNone/>
-                      </a:pPr>
-                      <a:r>
-                        <a:rPr lang="en-US" sz="1400" dirty="0">
-                          <a:solidFill>
-                            <a:srgbClr val="000000"/>
-                          </a:solidFill>
-                          <a:latin typeface="Times New Roman" pitchFamily="34" charset="0"/>
-                          <a:ea typeface="Times New Roman" pitchFamily="34" charset="-122"/>
-                          <a:cs typeface="Times New Roman" pitchFamily="34" charset="-120"/>
-                        </a:rPr>
-                        <a:t>SVM</a:t>
-                      </a:r>
-                      <a:endParaRPr lang="en-US" sz="1400" dirty="0">
-                        <a:latin typeface="Times New Roman" charset="0"/>
-                        <a:ea typeface="Times New Roman" charset="0"/>
-                        <a:cs typeface="Times New Roman" charset="0"/>
-                      </a:endParaRPr>
-                    </a:p>
-                  </a:txBody>
-                  <a:tcPr marL="91440" marR="91440" marT="45720" marB="45720" anchor="ctr">
-                    <a:lnL w="12700" cap="flat" cmpd="sng" algn="ctr">
-                      <a:solidFill>
-                        <a:srgbClr val="999999"/>
-                      </a:solidFill>
-                      <a:prstDash val="solid"/>
-                      <a:round/>
-                      <a:headEnd type="none" w="med" len="med"/>
-                      <a:tailEnd type="none" w="med" len="med"/>
-                    </a:lnL>
-                    <a:lnR w="12700" cap="flat" cmpd="sng" algn="ctr">
-                      <a:solidFill>
-                        <a:srgbClr val="999999"/>
-                      </a:solidFill>
-                      <a:prstDash val="solid"/>
-                      <a:round/>
-                      <a:headEnd type="none" w="med" len="med"/>
-                      <a:tailEnd type="none" w="med" len="med"/>
-                    </a:lnR>
-                    <a:lnT w="12700" cap="flat" cmpd="sng" algn="ctr">
-                      <a:solidFill>
-                        <a:srgbClr val="999999"/>
-                      </a:solidFill>
-                      <a:prstDash val="solid"/>
-                      <a:round/>
-                      <a:headEnd type="none" w="med" len="med"/>
-                      <a:tailEnd type="none" w="med" len="med"/>
-                    </a:lnT>
-                    <a:lnB w="12700" cap="flat" cmpd="sng" algn="ctr">
-                      <a:solidFill>
-                        <a:srgbClr val="999999"/>
-                      </a:solidFill>
-                      <a:prstDash val="solid"/>
-                      <a:round/>
-                      <a:headEnd type="none" w="med" len="med"/>
-                      <a:tailEnd type="none" w="med" len="med"/>
-                    </a:lnB>
-                  </a:tcPr>
-                </a:tc>
-                <a:tc>
-                  <a:txBody>
-                    <a:bodyPr/>
-                    <a:lstStyle/>
-                    <a:p>
-                      <a:pPr algn="ctr" indent="0" marL="0">
-                        <a:buNone/>
-                      </a:pPr>
-                      <a:r>
-                        <a:rPr lang="en-US" sz="1400" dirty="0">
-                          <a:solidFill>
-                            <a:srgbClr val="000000"/>
-                          </a:solidFill>
-                          <a:latin typeface="Times New Roman" pitchFamily="34" charset="0"/>
-                          <a:ea typeface="Times New Roman" pitchFamily="34" charset="-122"/>
-                          <a:cs typeface="Times New Roman" pitchFamily="34" charset="-120"/>
-                        </a:rPr>
-                        <a:t>14 dB</a:t>
-                      </a:r>
-                      <a:endParaRPr lang="en-US" sz="1400" dirty="0">
-                        <a:latin typeface="Times New Roman" charset="0"/>
-                        <a:ea typeface="Times New Roman" charset="0"/>
-                        <a:cs typeface="Times New Roman" charset="0"/>
-                      </a:endParaRPr>
-                    </a:p>
-                  </a:txBody>
-                  <a:tcPr marL="91440" marR="91440" marT="45720" marB="45720" anchor="ctr">
-                    <a:lnL w="12700" cap="flat" cmpd="sng" algn="ctr">
-                      <a:solidFill>
-                        <a:srgbClr val="999999"/>
-                      </a:solidFill>
-                      <a:prstDash val="solid"/>
-                      <a:round/>
-                      <a:headEnd type="none" w="med" len="med"/>
-                      <a:tailEnd type="none" w="med" len="med"/>
-                    </a:lnL>
-                    <a:lnR w="12700" cap="flat" cmpd="sng" algn="ctr">
-                      <a:solidFill>
-                        <a:srgbClr val="999999"/>
-                      </a:solidFill>
-                      <a:prstDash val="solid"/>
-                      <a:round/>
-                      <a:headEnd type="none" w="med" len="med"/>
-                      <a:tailEnd type="none" w="med" len="med"/>
-                    </a:lnR>
-                    <a:lnT w="12700" cap="flat" cmpd="sng" algn="ctr">
-                      <a:solidFill>
-                        <a:srgbClr val="999999"/>
-                      </a:solidFill>
-                      <a:prstDash val="solid"/>
-                      <a:round/>
-                      <a:headEnd type="none" w="med" len="med"/>
-                      <a:tailEnd type="none" w="med" len="med"/>
-                    </a:lnT>
-                    <a:lnB w="12700" cap="flat" cmpd="sng" algn="ctr">
-                      <a:solidFill>
-                        <a:srgbClr val="999999"/>
-                      </a:solidFill>
-                      <a:prstDash val="solid"/>
-                      <a:round/>
-                      <a:headEnd type="none" w="med" len="med"/>
-                      <a:tailEnd type="none" w="med" len="med"/>
-                    </a:lnB>
-                  </a:tcPr>
-                </a:tc>
-                <a:tc>
-                  <a:txBody>
-                    <a:bodyPr/>
-                    <a:lstStyle/>
-                    <a:p>
-                      <a:pPr algn="ctr" indent="0" marL="0">
-                        <a:buNone/>
-                      </a:pPr>
-                      <a:r>
-                        <a:rPr lang="en-US" sz="1400" dirty="0">
-                          <a:solidFill>
-                            <a:srgbClr val="000000"/>
-                          </a:solidFill>
-                          <a:latin typeface="Times New Roman" pitchFamily="34" charset="0"/>
-                          <a:ea typeface="Times New Roman" pitchFamily="34" charset="-122"/>
-                          <a:cs typeface="Times New Roman" pitchFamily="34" charset="-120"/>
-                        </a:rPr>
-                        <a:t>18 dB</a:t>
-                      </a:r>
-                      <a:endParaRPr lang="en-US" sz="1400" dirty="0">
-                        <a:latin typeface="Times New Roman" charset="0"/>
-                        <a:ea typeface="Times New Roman" charset="0"/>
-                        <a:cs typeface="Times New Roman" charset="0"/>
-                      </a:endParaRPr>
-                    </a:p>
-                  </a:txBody>
-                  <a:tcPr marL="91440" marR="91440" marT="45720" marB="45720" anchor="ctr">
-                    <a:lnL w="12700" cap="flat" cmpd="sng" algn="ctr">
-                      <a:solidFill>
-                        <a:srgbClr val="999999"/>
-                      </a:solidFill>
-                      <a:prstDash val="solid"/>
-                      <a:round/>
-                      <a:headEnd type="none" w="med" len="med"/>
-                      <a:tailEnd type="none" w="med" len="med"/>
-                    </a:lnL>
-                    <a:lnR w="12700" cap="flat" cmpd="sng" algn="ctr">
-                      <a:solidFill>
-                        <a:srgbClr val="999999"/>
-                      </a:solidFill>
-                      <a:prstDash val="solid"/>
-                      <a:round/>
-                      <a:headEnd type="none" w="med" len="med"/>
-                      <a:tailEnd type="none" w="med" len="med"/>
-                    </a:lnR>
-                    <a:lnT w="12700" cap="flat" cmpd="sng" algn="ctr">
-                      <a:solidFill>
-                        <a:srgbClr val="999999"/>
-                      </a:solidFill>
-                      <a:prstDash val="solid"/>
-                      <a:round/>
-                      <a:headEnd type="none" w="med" len="med"/>
-                      <a:tailEnd type="none" w="med" len="med"/>
-                    </a:lnT>
-                    <a:lnB w="12700" cap="flat" cmpd="sng" algn="ctr">
-                      <a:solidFill>
-                        <a:srgbClr val="999999"/>
-                      </a:solidFill>
-                      <a:prstDash val="solid"/>
-                      <a:round/>
-                      <a:headEnd type="none" w="med" len="med"/>
-                      <a:tailEnd type="none" w="med" len="med"/>
-                    </a:lnB>
-                  </a:tcPr>
-                </a:tc>
-              </a:tr>
-              <a:tr h="347472">
-                <a:tc>
-                  <a:txBody>
-                    <a:bodyPr/>
-                    <a:lstStyle/>
-                    <a:p>
-                      <a:pPr indent="0" marL="0">
-                        <a:buNone/>
-                      </a:pPr>
-                      <a:r>
-                        <a:rPr lang="en-US" sz="1400" dirty="0">
-                          <a:solidFill>
-                            <a:srgbClr val="000000"/>
-                          </a:solidFill>
-                          <a:latin typeface="Times New Roman" pitchFamily="34" charset="0"/>
-                          <a:ea typeface="Times New Roman" pitchFamily="34" charset="-122"/>
-                          <a:cs typeface="Times New Roman" pitchFamily="34" charset="-120"/>
-                        </a:rPr>
-                        <a:t>k-NN</a:t>
-                      </a:r>
-                      <a:endParaRPr lang="en-US" sz="1400" dirty="0">
-                        <a:latin typeface="Times New Roman" charset="0"/>
-                        <a:ea typeface="Times New Roman" charset="0"/>
-                        <a:cs typeface="Times New Roman" charset="0"/>
-                      </a:endParaRPr>
-                    </a:p>
-                  </a:txBody>
-                  <a:tcPr marL="91440" marR="91440" marT="45720" marB="45720" anchor="ctr">
-                    <a:lnL w="12700" cap="flat" cmpd="sng" algn="ctr">
-                      <a:solidFill>
-                        <a:srgbClr val="999999"/>
-                      </a:solidFill>
-                      <a:prstDash val="solid"/>
-                      <a:round/>
-                      <a:headEnd type="none" w="med" len="med"/>
-                      <a:tailEnd type="none" w="med" len="med"/>
-                    </a:lnL>
-                    <a:lnR w="12700" cap="flat" cmpd="sng" algn="ctr">
-                      <a:solidFill>
-                        <a:srgbClr val="999999"/>
-                      </a:solidFill>
-                      <a:prstDash val="solid"/>
-                      <a:round/>
-                      <a:headEnd type="none" w="med" len="med"/>
-                      <a:tailEnd type="none" w="med" len="med"/>
-                    </a:lnR>
-                    <a:lnT w="12700" cap="flat" cmpd="sng" algn="ctr">
-                      <a:solidFill>
-                        <a:srgbClr val="999999"/>
-                      </a:solidFill>
-                      <a:prstDash val="solid"/>
-                      <a:round/>
-                      <a:headEnd type="none" w="med" len="med"/>
-                      <a:tailEnd type="none" w="med" len="med"/>
-                    </a:lnT>
-                    <a:lnB w="12700" cap="flat" cmpd="sng" algn="ctr">
-                      <a:solidFill>
-                        <a:srgbClr val="999999"/>
-                      </a:solidFill>
-                      <a:prstDash val="solid"/>
-                      <a:round/>
-                      <a:headEnd type="none" w="med" len="med"/>
-                      <a:tailEnd type="none" w="med" len="med"/>
-                    </a:lnB>
-                  </a:tcPr>
-                </a:tc>
-                <a:tc>
-                  <a:txBody>
-                    <a:bodyPr/>
-                    <a:lstStyle/>
-                    <a:p>
-                      <a:pPr algn="ctr" indent="0" marL="0">
-                        <a:buNone/>
-                      </a:pPr>
-                      <a:r>
-                        <a:rPr lang="en-US" sz="1400" dirty="0">
-                          <a:solidFill>
-                            <a:srgbClr val="000000"/>
-                          </a:solidFill>
-                          <a:latin typeface="Times New Roman" pitchFamily="34" charset="0"/>
-                          <a:ea typeface="Times New Roman" pitchFamily="34" charset="-122"/>
-                          <a:cs typeface="Times New Roman" pitchFamily="34" charset="-120"/>
-                        </a:rPr>
-                        <a:t>15 dB</a:t>
-                      </a:r>
-                      <a:endParaRPr lang="en-US" sz="1400" dirty="0">
-                        <a:latin typeface="Times New Roman" charset="0"/>
-                        <a:ea typeface="Times New Roman" charset="0"/>
-                        <a:cs typeface="Times New Roman" charset="0"/>
-                      </a:endParaRPr>
-                    </a:p>
-                  </a:txBody>
-                  <a:tcPr marL="91440" marR="91440" marT="45720" marB="45720" anchor="ctr">
-                    <a:lnL w="12700" cap="flat" cmpd="sng" algn="ctr">
-                      <a:solidFill>
-                        <a:srgbClr val="999999"/>
-                      </a:solidFill>
-                      <a:prstDash val="solid"/>
-                      <a:round/>
-                      <a:headEnd type="none" w="med" len="med"/>
-                      <a:tailEnd type="none" w="med" len="med"/>
-                    </a:lnL>
-                    <a:lnR w="12700" cap="flat" cmpd="sng" algn="ctr">
-                      <a:solidFill>
-                        <a:srgbClr val="999999"/>
-                      </a:solidFill>
-                      <a:prstDash val="solid"/>
-                      <a:round/>
-                      <a:headEnd type="none" w="med" len="med"/>
-                      <a:tailEnd type="none" w="med" len="med"/>
-                    </a:lnR>
-                    <a:lnT w="12700" cap="flat" cmpd="sng" algn="ctr">
-                      <a:solidFill>
-                        <a:srgbClr val="999999"/>
-                      </a:solidFill>
-                      <a:prstDash val="solid"/>
-                      <a:round/>
-                      <a:headEnd type="none" w="med" len="med"/>
-                      <a:tailEnd type="none" w="med" len="med"/>
-                    </a:lnT>
-                    <a:lnB w="12700" cap="flat" cmpd="sng" algn="ctr">
-                      <a:solidFill>
-                        <a:srgbClr val="999999"/>
-                      </a:solidFill>
-                      <a:prstDash val="solid"/>
-                      <a:round/>
-                      <a:headEnd type="none" w="med" len="med"/>
-                      <a:tailEnd type="none" w="med" len="med"/>
-                    </a:lnB>
-                  </a:tcPr>
-                </a:tc>
-                <a:tc>
-                  <a:txBody>
-                    <a:bodyPr/>
-                    <a:lstStyle/>
-                    <a:p>
-                      <a:pPr algn="ctr" indent="0" marL="0">
-                        <a:buNone/>
-                      </a:pPr>
-                      <a:r>
-                        <a:rPr lang="en-US" sz="1400" dirty="0">
-                          <a:solidFill>
-                            <a:srgbClr val="000000"/>
-                          </a:solidFill>
-                          <a:latin typeface="Times New Roman" pitchFamily="34" charset="0"/>
-                          <a:ea typeface="Times New Roman" pitchFamily="34" charset="-122"/>
-                          <a:cs typeface="Times New Roman" pitchFamily="34" charset="-120"/>
-                        </a:rPr>
-                        <a:t>18 dB</a:t>
-                      </a:r>
-                      <a:endParaRPr lang="en-US" sz="1400" dirty="0">
-                        <a:latin typeface="Times New Roman" charset="0"/>
-                        <a:ea typeface="Times New Roman" charset="0"/>
-                        <a:cs typeface="Times New Roman" charset="0"/>
-                      </a:endParaRPr>
-                    </a:p>
-                  </a:txBody>
-                  <a:tcPr marL="91440" marR="91440" marT="45720" marB="45720" anchor="ctr">
-                    <a:lnL w="12700" cap="flat" cmpd="sng" algn="ctr">
-                      <a:solidFill>
-                        <a:srgbClr val="999999"/>
-                      </a:solidFill>
-                      <a:prstDash val="solid"/>
-                      <a:round/>
-                      <a:headEnd type="none" w="med" len="med"/>
-                      <a:tailEnd type="none" w="med" len="med"/>
-                    </a:lnL>
-                    <a:lnR w="12700" cap="flat" cmpd="sng" algn="ctr">
-                      <a:solidFill>
-                        <a:srgbClr val="999999"/>
-                      </a:solidFill>
-                      <a:prstDash val="solid"/>
-                      <a:round/>
-                      <a:headEnd type="none" w="med" len="med"/>
-                      <a:tailEnd type="none" w="med" len="med"/>
-                    </a:lnR>
-                    <a:lnT w="12700" cap="flat" cmpd="sng" algn="ctr">
-                      <a:solidFill>
-                        <a:srgbClr val="999999"/>
-                      </a:solidFill>
-                      <a:prstDash val="solid"/>
-                      <a:round/>
-                      <a:headEnd type="none" w="med" len="med"/>
-                      <a:tailEnd type="none" w="med" len="med"/>
-                    </a:lnT>
-                    <a:lnB w="12700" cap="flat" cmpd="sng" algn="ctr">
-                      <a:solidFill>
-                        <a:srgbClr val="999999"/>
-                      </a:solidFill>
-                      <a:prstDash val="solid"/>
-                      <a:round/>
-                      <a:headEnd type="none" w="med" len="med"/>
-                      <a:tailEnd type="none" w="med" len="med"/>
-                    </a:lnB>
-                  </a:tcPr>
-                </a:tc>
-              </a:tr>
-            </a:tbl>
-          </a:graphicData>
-        </a:graphic>
-      </p:graphicFrame>
-      <p:sp>
-        <p:nvSpPr>
-          <p:cNvPr id="6" name="Text 3"/>
+      <p:sp>
+        <p:nvSpPr>
+          <p:cNvPr id="5" name="Text 3"/>
           <p:cNvSpPr txBox="1"/>
           <p:nvPr/>
         </p:nvSpPr>
         <p:spPr>
           <a:xfrm>
-            <a:off x="502920" y="2606040"/>
-            <a:ext cx="3931920" cy="548640"/>
+            <a:off x="502920" y="932688"/>
+            <a:ext cx="8138160" cy="320040"/>
           </a:xfrm>
           <a:prstGeom prst="rect">
             <a:avLst/>
@@ -7438,54 +6299,30 @@
               <a:buNone/>
             </a:pPr>
             <a:r>
-              <a:rPr lang="en-US" sz="1350" i="1" dirty="0">
-                <a:solidFill>
-                  <a:srgbClr val="333333"/>
-                </a:solidFill>
-                <a:latin typeface="Times New Roman" pitchFamily="34" charset="0"/>
-                <a:ea typeface="Times New Roman" pitchFamily="34" charset="-122"/>
-                <a:cs typeface="Times New Roman" pitchFamily="34" charset="-120"/>
-              </a:rPr>
-              <a:t>A 7 dB OSNR margin — which converts directly into reach or amplifier count.</a:t>
-            </a:r>
-            <a:endParaRPr lang="en-US" sz="1350" dirty="0"/>
-          </a:p>
-        </p:txBody>
-      </p:sp>
-      <p:pic>
-        <p:nvPicPr>
-          <p:cNvPr id="7" name="Image 0" descr="D:\research paper\figures\fig8_robustness.png">    </p:cNvPr>
-          <p:cNvPicPr>
-            <a:picLocks noChangeAspect="1"/>
-          </p:cNvPicPr>
+              <a:rPr lang="en-US" sz="1550" b="1" dirty="0">
+                <a:solidFill>
+                  <a:srgbClr val="000000"/>
+                </a:solidFill>
+                <a:latin typeface="Times New Roman" pitchFamily="34" charset="0"/>
+                <a:ea typeface="Times New Roman" pitchFamily="34" charset="-122"/>
+                <a:cs typeface="Times New Roman" pitchFamily="34" charset="-120"/>
+              </a:rPr>
+              <a:t>Four further experiments are complete; detailed analysis is in preparation for the end-semester review:</a:t>
+            </a:r>
+            <a:endParaRPr lang="en-US" sz="1550" dirty="0"/>
+          </a:p>
+        </p:txBody>
+      </p:sp>
+      <p:sp>
+        <p:nvSpPr>
+          <p:cNvPr id="6" name="Text 4"/>
+          <p:cNvSpPr txBox="1"/>
           <p:nvPr/>
-        </p:nvPicPr>
-        <p:blipFill>
-          <a:blip r:embed="rId1"/>
-          <a:stretch>
-            <a:fillRect/>
-          </a:stretch>
-        </p:blipFill>
+        </p:nvSpPr>
         <p:spPr>
           <a:xfrm>
-            <a:off x="4572000" y="960120"/>
-            <a:ext cx="4206240" cy="1709928"/>
-          </a:xfrm>
-          <a:prstGeom prst="rect">
-            <a:avLst/>
-          </a:prstGeom>
-        </p:spPr>
-      </p:pic>
-      <p:sp>
-        <p:nvSpPr>
-          <p:cNvPr id="8" name="Text 4"/>
-          <p:cNvSpPr txBox="1"/>
-          <p:nvPr/>
-        </p:nvSpPr>
-        <p:spPr>
-          <a:xfrm>
-            <a:off x="548640" y="3063240"/>
-            <a:ext cx="8046720" cy="3108960"/>
+            <a:off x="685800" y="1325880"/>
+            <a:ext cx="7955280" cy="2103120"/>
           </a:xfrm>
           <a:prstGeom prst="rect">
             <a:avLst/>
@@ -7499,107 +6336,249 @@
           <a:p>
             <a:pPr marL="342900" indent="-342900">
               <a:spcAft>
-                <a:spcPts val="600"/>
+                <a:spcPts val="700"/>
               </a:spcAft>
               <a:buSzPct val="100000"/>
               <a:buChar char="▪"/>
             </a:pPr>
             <a:r>
-              <a:rPr lang="en-US" sz="1450" b="1" dirty="0">
-                <a:solidFill>
-                  <a:srgbClr val="000000"/>
-                </a:solidFill>
-                <a:latin typeface="Times New Roman" pitchFamily="34" charset="0"/>
-                <a:ea typeface="Times New Roman" pitchFamily="34" charset="-122"/>
-                <a:cs typeface="Times New Roman" pitchFamily="34" charset="-120"/>
-              </a:rPr>
-              <a:t>Trained on a clean channel, tested on a severe one: CNN holds 89.8 %, the SVM collapses to 21.8 % against a 20 % chance level.</a:t>
-            </a:r>
-            <a:endParaRPr lang="en-US" sz="1450" dirty="0"/>
+              <a:rPr lang="en-US" sz="1400" dirty="0">
+                <a:solidFill>
+                  <a:srgbClr val="000000"/>
+                </a:solidFill>
+                <a:latin typeface="Times New Roman" pitchFamily="34" charset="0"/>
+                <a:ea typeface="Times New Roman" pitchFamily="34" charset="-122"/>
+                <a:cs typeface="Times New Roman" pitchFamily="34" charset="-120"/>
+              </a:rPr>
+              <a:t>Channel robustness — under a channel it was not trained on, the feature-based classifier falls to 21.8 %, against a 20 % chance level.</a:t>
+            </a:r>
+            <a:endParaRPr lang="en-US" sz="1400" dirty="0"/>
           </a:p>
           <a:p>
             <a:pPr marL="342900" indent="-342900">
               <a:spcAft>
-                <a:spcPts val="600"/>
+                <a:spcPts val="700"/>
               </a:spcAft>
               <a:buSzPct val="100000"/>
               <a:buChar char="▪"/>
             </a:pPr>
             <a:r>
-              <a:rPr lang="en-US" sz="1450" dirty="0">
-                <a:solidFill>
-                  <a:srgbClr val="000000"/>
-                </a:solidFill>
-                <a:latin typeface="Times New Roman" pitchFamily="34" charset="0"/>
-                <a:ea typeface="Times New Roman" pitchFamily="34" charset="-122"/>
-                <a:cs typeface="Times New Roman" pitchFamily="34" charset="-120"/>
-              </a:rPr>
-              <a:t>Cumulants are statistics of an assumed signal model. Change the impairments and the learned boundaries stop meaning anything.</a:t>
-            </a:r>
-            <a:endParaRPr lang="en-US" sz="1450" dirty="0"/>
+              <a:rPr lang="en-US" sz="1400" dirty="0">
+                <a:solidFill>
+                  <a:srgbClr val="000000"/>
+                </a:solidFill>
+                <a:latin typeface="Times New Roman" pitchFamily="34" charset="0"/>
+                <a:ea typeface="Times New Roman" pitchFamily="34" charset="-122"/>
+                <a:cs typeface="Times New Roman" pitchFamily="34" charset="-120"/>
+              </a:rPr>
+              <a:t>Failure self-detection — at a 90 % confidence gate the two representations differ by roughly 447× in how many inputs they can still answer.</a:t>
+            </a:r>
+            <a:endParaRPr lang="en-US" sz="1400" dirty="0"/>
           </a:p>
           <a:p>
             <a:pPr marL="342900" indent="-342900">
               <a:spcAft>
-                <a:spcPts val="600"/>
+                <a:spcPts val="700"/>
               </a:spcAft>
               <a:buSzPct val="100000"/>
               <a:buChar char="▪"/>
             </a:pPr>
             <a:r>
-              <a:rPr lang="en-US" sz="1450" dirty="0">
-                <a:solidFill>
-                  <a:srgbClr val="000000"/>
-                </a:solidFill>
-                <a:latin typeface="Times New Roman" pitchFamily="34" charset="0"/>
-                <a:ea typeface="Times New Roman" pitchFamily="34" charset="-122"/>
-                <a:cs typeface="Times New Roman" pitchFamily="34" charset="-120"/>
-              </a:rPr>
-              <a:t>Failure self-detection: at a 90 % confidence gate the CNN still answers 86.9 % of inputs, the SVM answers 0.2 % — a 447× difference in usable coverage.</a:t>
-            </a:r>
-            <a:endParaRPr lang="en-US" sz="1450" dirty="0"/>
+              <a:rPr lang="en-US" sz="1400" dirty="0">
+                <a:solidFill>
+                  <a:srgbClr val="000000"/>
+                </a:solidFill>
+                <a:latin typeface="Times New Roman" pitchFamily="34" charset="0"/>
+                <a:ea typeface="Times New Roman" pitchFamily="34" charset="-122"/>
+                <a:cs typeface="Times New Roman" pitchFamily="34" charset="-120"/>
+              </a:rPr>
+              <a:t>Impairment tolerance — including one case, residual chromatic dispersion, where the feature-based model outperforms the CNN.</a:t>
+            </a:r>
+            <a:endParaRPr lang="en-US" sz="1400" dirty="0"/>
           </a:p>
           <a:p>
             <a:pPr marL="342900" indent="-342900">
               <a:spcAft>
-                <a:spcPts val="600"/>
+                <a:spcPts val="700"/>
               </a:spcAft>
               <a:buSzPct val="100000"/>
               <a:buChar char="▪"/>
             </a:pPr>
             <a:r>
-              <a:rPr lang="en-US" sz="1450" dirty="0">
-                <a:solidFill>
-                  <a:srgbClr val="000000"/>
-                </a:solidFill>
-                <a:latin typeface="Times New Roman" pitchFamily="34" charset="0"/>
-                <a:ea typeface="Times New Roman" pitchFamily="34" charset="-122"/>
-                <a:cs typeface="Times New Roman" pitchFamily="34" charset="-120"/>
-              </a:rPr>
-              <a:t>The feature-based monitor can be made accurate only by silencing it. This interaction has not, to our knowledge, been reported before.</a:t>
-            </a:r>
-            <a:endParaRPr lang="en-US" sz="1450" dirty="0"/>
-          </a:p>
+              <a:rPr lang="en-US" sz="1400" dirty="0">
+                <a:solidFill>
+                  <a:srgbClr val="000000"/>
+                </a:solidFill>
+                <a:latin typeface="Times New Roman" pitchFamily="34" charset="0"/>
+                <a:ea typeface="Times New Roman" pitchFamily="34" charset="-122"/>
+                <a:cs typeface="Times New Roman" pitchFamily="34" charset="-120"/>
+              </a:rPr>
+              <a:t>Architecture ablation — accuracy is insensitive to model capacity across a 9.2× range in parameter count.</a:t>
+            </a:r>
+            <a:endParaRPr lang="en-US" sz="1400" dirty="0"/>
+          </a:p>
+        </p:txBody>
+      </p:sp>
+      <p:sp>
+        <p:nvSpPr>
+          <p:cNvPr id="7" name="Text 5"/>
+          <p:cNvSpPr txBox="1"/>
+          <p:nvPr/>
+        </p:nvSpPr>
+        <p:spPr>
+          <a:xfrm>
+            <a:off x="502920" y="3566160"/>
+            <a:ext cx="8138160" cy="320040"/>
+          </a:xfrm>
+          <a:prstGeom prst="rect">
+            <a:avLst/>
+          </a:prstGeom>
+          <a:noFill/>
+          <a:ln/>
+        </p:spPr>
+        <p:txBody>
+          <a:bodyPr wrap="square" rtlCol="0" anchor="ctr"/>
+          <a:lstStyle/>
+          <a:p>
+            <a:pPr indent="0" marL="0">
+              <a:buNone/>
+            </a:pPr>
+            <a:r>
+              <a:rPr lang="en-US" sz="1550" b="1" dirty="0">
+                <a:solidFill>
+                  <a:srgbClr val="000000"/>
+                </a:solidFill>
+                <a:latin typeface="Times New Roman" pitchFamily="34" charset="0"/>
+                <a:ea typeface="Times New Roman" pitchFamily="34" charset="-122"/>
+                <a:cs typeface="Times New Roman" pitchFamily="34" charset="-120"/>
+              </a:rPr>
+              <a:t>Candidate directions for the remainder of the project:</a:t>
+            </a:r>
+            <a:endParaRPr lang="en-US" sz="1550" dirty="0"/>
+          </a:p>
+        </p:txBody>
+      </p:sp>
+      <p:sp>
+        <p:nvSpPr>
+          <p:cNvPr id="8" name="Text 6"/>
+          <p:cNvSpPr txBox="1"/>
+          <p:nvPr/>
+        </p:nvSpPr>
+        <p:spPr>
+          <a:xfrm>
+            <a:off x="685800" y="3959352"/>
+            <a:ext cx="7955280" cy="1645920"/>
+          </a:xfrm>
+          <a:prstGeom prst="rect">
+            <a:avLst/>
+          </a:prstGeom>
+          <a:noFill/>
+          <a:ln/>
+        </p:spPr>
+        <p:txBody>
+          <a:bodyPr wrap="square" rtlCol="0" anchor="t"/>
+          <a:lstStyle/>
           <a:p>
             <a:pPr marL="342900" indent="-342900">
               <a:spcAft>
-                <a:spcPts val="600"/>
+                <a:spcPts val="700"/>
               </a:spcAft>
               <a:buSzPct val="100000"/>
               <a:buChar char="▪"/>
             </a:pPr>
             <a:r>
-              <a:rPr lang="en-US" sz="1450" dirty="0">
-                <a:solidFill>
-                  <a:srgbClr val="000000"/>
-                </a:solidFill>
-                <a:latin typeface="Times New Roman" pitchFamily="34" charset="0"/>
-                <a:ea typeface="Times New Roman" pitchFamily="34" charset="-122"/>
-                <a:cs typeface="Times New Roman" pitchFamily="34" charset="-120"/>
-              </a:rPr>
-              <a:t>Capture length: the CNN with 512 symbols (94.08 %) beats the SVM with 4096 (93.82 %).</a:t>
-            </a:r>
-            <a:endParaRPr lang="en-US" sz="1450" dirty="0"/>
+              <a:rPr lang="en-US" sz="1400" dirty="0">
+                <a:solidFill>
+                  <a:srgbClr val="000000"/>
+                </a:solidFill>
+                <a:latin typeface="Times New Roman" pitchFamily="34" charset="0"/>
+                <a:ea typeface="Times New Roman" pitchFamily="34" charset="-122"/>
+                <a:cs typeface="Times New Roman" pitchFamily="34" charset="-120"/>
+              </a:rPr>
+              <a:t>Fibre nonlinearity — our robustness result makes a specific, testable prediction, since nonlinear interference is not Gaussian.</a:t>
+            </a:r>
+            <a:endParaRPr lang="en-US" sz="1400" dirty="0"/>
+          </a:p>
+          <a:p>
+            <a:pPr marL="342900" indent="-342900">
+              <a:spcAft>
+                <a:spcPts val="700"/>
+              </a:spcAft>
+              <a:buSzPct val="100000"/>
+              <a:buChar char="▪"/>
+            </a:pPr>
+            <a:r>
+              <a:rPr lang="en-US" sz="1400" dirty="0">
+                <a:solidFill>
+                  <a:srgbClr val="000000"/>
+                </a:solidFill>
+                <a:latin typeface="Times New Roman" pitchFamily="34" charset="0"/>
+                <a:ea typeface="Times New Roman" pitchFamily="34" charset="-122"/>
+                <a:cs typeface="Times New Roman" pitchFamily="34" charset="-120"/>
+              </a:rPr>
+              <a:t>Polarisation-multiplexed signals — the principal realism gap against deployed systems.</a:t>
+            </a:r>
+            <a:endParaRPr lang="en-US" sz="1400" dirty="0"/>
+          </a:p>
+          <a:p>
+            <a:pPr marL="342900" indent="-342900">
+              <a:spcAft>
+                <a:spcPts val="700"/>
+              </a:spcAft>
+              <a:buSzPct val="100000"/>
+              <a:buChar char="▪"/>
+            </a:pPr>
+            <a:r>
+              <a:rPr lang="en-US" sz="1400" dirty="0">
+                <a:solidFill>
+                  <a:srgbClr val="000000"/>
+                </a:solidFill>
+                <a:latin typeface="Times New Roman" pitchFamily="34" charset="0"/>
+                <a:ea typeface="Times New Roman" pitchFamily="34" charset="-122"/>
+                <a:cs typeface="Times New Roman" pitchFamily="34" charset="-120"/>
+              </a:rPr>
+              <a:t>Explaining the chromatic dispersion case, where our own result inverts.</a:t>
+            </a:r>
+            <a:endParaRPr lang="en-US" sz="1400" dirty="0"/>
+          </a:p>
+        </p:txBody>
+      </p:sp>
+      <p:sp>
+        <p:nvSpPr>
+          <p:cNvPr id="9" name="Text 7"/>
+          <p:cNvSpPr txBox="1"/>
+          <p:nvPr/>
+        </p:nvSpPr>
+        <p:spPr>
+          <a:xfrm>
+            <a:off x="502920" y="5669280"/>
+            <a:ext cx="8138160" cy="365760"/>
+          </a:xfrm>
+          <a:prstGeom prst="rect">
+            <a:avLst/>
+          </a:prstGeom>
+          <a:noFill/>
+          <a:ln/>
+        </p:spPr>
+        <p:txBody>
+          <a:bodyPr wrap="square" rtlCol="0" anchor="ctr"/>
+          <a:lstStyle/>
+          <a:p>
+            <a:pPr algn="ctr" indent="0" marL="0">
+              <a:buNone/>
+            </a:pPr>
+            <a:r>
+              <a:rPr lang="en-US" sz="1550" b="1" dirty="0">
+                <a:solidFill>
+                  <a:srgbClr val="0070C0"/>
+                </a:solidFill>
+                <a:latin typeface="Times New Roman" pitchFamily="34" charset="0"/>
+                <a:ea typeface="Times New Roman" pitchFamily="34" charset="-122"/>
+                <a:cs typeface="Times New Roman" pitchFamily="34" charset="-120"/>
+              </a:rPr>
+              <a:t>We would welcome the committee’s guidance on which of these to prioritise.</a:t>
+            </a:r>
+            <a:endParaRPr lang="en-US" sz="1550" dirty="0"/>
           </a:p>
         </p:txBody>
       </p:sp>

--- a/BTP_MidSem_Presentation.pptx
+++ b/BTP_MidSem_Presentation.pptx
@@ -1493,7 +1493,7 @@
             <a:r>
               <a:rPr lang="en-US" dirty="0"/>
               <a:t>SAJAN - 60 s
-This slide does two jobs. First: four further experiments ARE complete - say complete, not 'planned' - with analysis in preparation. Give each one line, no more. If anyone asks for a number, give it immediately; never look evasive. Second: the three candidate directions. End by genuinely asking which they want prioritised, then STOP TALKING and let them answer. That question is the point of the slide.</a:t>
+This slide does two jobs. First: four further experiments ARE complete - say complete, not 'planned' - with analysis in preparation. One line each, no more. If anyone asks for a number, give it immediately; never look evasive. Second: state the Phase 2 plan with conviction. Do NOT ask them to choose. Say what you are doing and why nonlinearity is first. If they want to redirect you they will say so, and then you thank them and write it down. Asking a committee to pick for you invites the reading that you have not thought about it.</a:t>
             </a:r>
             <a:endParaRPr lang="en-US" dirty="0"/>
           </a:p>
@@ -6452,7 +6452,7 @@
                 <a:ea typeface="Times New Roman" pitchFamily="34" charset="-122"/>
                 <a:cs typeface="Times New Roman" pitchFamily="34" charset="-120"/>
               </a:rPr>
-              <a:t>Candidate directions for the remainder of the project:</a:t>
+              <a:t>Planned work for the remainder of the project:</a:t>
             </a:r>
             <a:endParaRPr lang="en-US" sz="1550" dirty="0"/>
           </a:p>
@@ -6487,15 +6487,15 @@
               <a:buChar char="▪"/>
             </a:pPr>
             <a:r>
-              <a:rPr lang="en-US" sz="1400" dirty="0">
-                <a:solidFill>
-                  <a:srgbClr val="000000"/>
-                </a:solidFill>
-                <a:latin typeface="Times New Roman" pitchFamily="34" charset="0"/>
-                <a:ea typeface="Times New Roman" pitchFamily="34" charset="-122"/>
-                <a:cs typeface="Times New Roman" pitchFamily="34" charset="-120"/>
-              </a:rPr>
-              <a:t>Fibre nonlinearity — our robustness result makes a specific, testable prediction, since nonlinear interference is not Gaussian.</a:t>
+              <a:rPr lang="en-US" sz="1400" b="1" dirty="0">
+                <a:solidFill>
+                  <a:srgbClr val="000000"/>
+                </a:solidFill>
+                <a:latin typeface="Times New Roman" pitchFamily="34" charset="0"/>
+                <a:ea typeface="Times New Roman" pitchFamily="34" charset="-122"/>
+                <a:cs typeface="Times New Roman" pitchFamily="34" charset="-120"/>
+              </a:rPr>
+              <a:t>1.  Fibre nonlinearity. Our robustness result already makes a falsifiable prediction here — nonlinear interference is not Gaussian, so the feature-based models should degrade further. We begin with this.</a:t>
             </a:r>
             <a:endParaRPr lang="en-US" sz="1400" dirty="0"/>
           </a:p>
@@ -6516,7 +6516,7 @@
                 <a:ea typeface="Times New Roman" pitchFamily="34" charset="-122"/>
                 <a:cs typeface="Times New Roman" pitchFamily="34" charset="-120"/>
               </a:rPr>
-              <a:t>Polarisation-multiplexed signals — the principal realism gap against deployed systems.</a:t>
+              <a:t>2.  Polarisation-multiplexed signals, closing the principal realism gap against deployed systems.</a:t>
             </a:r>
             <a:endParaRPr lang="en-US" sz="1400" dirty="0"/>
           </a:p>
@@ -6537,7 +6537,7 @@
                 <a:ea typeface="Times New Roman" pitchFamily="34" charset="-122"/>
                 <a:cs typeface="Times New Roman" pitchFamily="34" charset="-120"/>
               </a:rPr>
-              <a:t>Explaining the chromatic dispersion case, where our own result inverts.</a:t>
+              <a:t>3.  Establishing the mechanism behind the chromatic dispersion case, where our own result inverts.</a:t>
             </a:r>
             <a:endParaRPr lang="en-US" sz="1400" dirty="0"/>
           </a:p>
@@ -6576,7 +6576,7 @@
                 <a:ea typeface="Times New Roman" pitchFamily="34" charset="-122"/>
                 <a:cs typeface="Times New Roman" pitchFamily="34" charset="-120"/>
               </a:rPr>
-              <a:t>We would welcome the committee’s guidance on which of these to prioritise.</a:t>
+              <a:t>Phase 2 begins with the nonlinearity experiment; its design is already fixed by the Phase 1 result.</a:t>
             </a:r>
             <a:endParaRPr lang="en-US" sz="1550" dirty="0"/>
           </a:p>

--- a/BTP_MidSem_Presentation.pptx
+++ b/BTP_MidSem_Presentation.pptx
@@ -2017,7 +2017,7 @@
                 <a:ea typeface="Times New Roman" pitchFamily="34" charset="-122"/>
                 <a:cs typeface="Times New Roman" pitchFamily="34" charset="-120"/>
               </a:rPr>
-              <a:t>__________</a:t>
+              <a:t>2023UEA7232</a:t>
             </a:r>
             <a:endParaRPr lang="en-US" sz="1600" dirty="0"/>
           </a:p>
@@ -2095,7 +2095,7 @@
                 <a:ea typeface="Times New Roman" pitchFamily="34" charset="-122"/>
                 <a:cs typeface="Times New Roman" pitchFamily="34" charset="-120"/>
               </a:rPr>
-              <a:t>__________</a:t>
+              <a:t>2023UEA7225</a:t>
             </a:r>
             <a:endParaRPr lang="en-US" sz="1600" dirty="0"/>
           </a:p>
@@ -2173,7 +2173,7 @@
                 <a:ea typeface="Times New Roman" pitchFamily="34" charset="-122"/>
                 <a:cs typeface="Times New Roman" pitchFamily="34" charset="-120"/>
               </a:rPr>
-              <a:t>__________</a:t>
+              <a:t>2023UEA6603</a:t>
             </a:r>
             <a:endParaRPr lang="en-US" sz="1600" dirty="0"/>
           </a:p>
@@ -2274,7 +2274,7 @@
                 <a:ea typeface="Times New Roman" pitchFamily="34" charset="-122"/>
                 <a:cs typeface="Times New Roman" pitchFamily="34" charset="-120"/>
               </a:rPr>
-              <a:t>Prof./Dr. ________________________</a:t>
+              <a:t>Dr. Manisha Khulbe</a:t>
             </a:r>
             <a:endParaRPr lang="en-US" sz="1600" dirty="0"/>
           </a:p>
@@ -2314,7 +2314,7 @@
                 <a:ea typeface="Times New Roman" pitchFamily="34" charset="-122"/>
                 <a:cs typeface="Times New Roman" pitchFamily="34" charset="-120"/>
               </a:rPr>
-              <a:t>Netaji Subhas University of Technology</a:t>
+              <a:t>Netaji Subhas University of Technology, East Campus</a:t>
             </a:r>
             <a:endParaRPr lang="en-US" sz="1600" dirty="0"/>
           </a:p>
@@ -2334,7 +2334,7 @@
                 <a:ea typeface="Times New Roman" pitchFamily="34" charset="-122"/>
                 <a:cs typeface="Times New Roman" pitchFamily="34" charset="-120"/>
               </a:rPr>
-              <a:t>(NSUT), Dwarka, New Delhi</a:t>
+              <a:t>Geeta Colony, New Delhi - 110031</a:t>
             </a:r>
             <a:endParaRPr lang="en-US" sz="1600" dirty="0"/>
           </a:p>
